--- a/10-Knowledge-Products/KP1-GEA/videos/module_5/en/decks/KP1_M5_5.3_Deck_v0.1.pptx
+++ b/10-Knowledge-Products/KP1-GEA/videos/module_5/en/decks/KP1_M5_5.3_Deck_v0.1.pptx
@@ -1082,6 +1082,12 @@
               <a:t>VO: Here is the argument the play helps you make. Inside any one project, building its own small identity function is cheaper and faster than reusing the national one. So every project builds its own. Across ten projects, the country has paid ten times for identity, and the citizen proves who they are on paper at every counter. The saving from re-use is real, but it only exists when you add up the whole government — which is exactly the view no project has, and the budget authority rarely sees.</a:t>
             </a:r>
           </a:p>
+          <a:p/>
+          <a:p>
+            <a:r>
+              <a:t>On screen: bar length is the argument — no figures. The top pair shows why the project chooses to build; the bottom pair shows what that choice costs the country. Reveal the bottom pair on 'Across ten projects'.</a:t>
+            </a:r>
+          </a:p>
         </p:txBody>
       </p:sp>
       <p:sp>
@@ -12606,25 +12612,93 @@
       </p:sp>
       <p:sp>
         <p:nvSpPr>
-          <p:cNvPr id="4" name="Rounded Rectangle 3"/>
+          <p:cNvPr id="4" name="TextBox 3"/>
+          <p:cNvSpPr txBox="1"/>
+          <p:nvPr/>
+        </p:nvSpPr>
+        <p:spPr>
+          <a:xfrm>
+            <a:off x="658368" y="1554480"/>
+            <a:ext cx="10881360" cy="329184"/>
+          </a:xfrm>
+          <a:prstGeom prst="rect">
+            <a:avLst/>
+          </a:prstGeom>
+          <a:noFill/>
+        </p:spPr>
+        <p:txBody>
+          <a:bodyPr wrap="square">
+            <a:spAutoFit/>
+          </a:bodyPr>
+          <a:lstStyle/>
+          <a:p>
+            <a:r>
+              <a:rPr sz="1200" b="1" i="0">
+                <a:solidFill>
+                  <a:srgbClr val="595959"/>
+                </a:solidFill>
+                <a:latin typeface="Arial"/>
+              </a:rPr>
+              <a:t>INSIDE ONE PROJECT — the project manager is making the right call, for the project</a:t>
+            </a:r>
+          </a:p>
+        </p:txBody>
+      </p:sp>
+      <p:sp>
+        <p:nvSpPr>
+          <p:cNvPr id="5" name="TextBox 4"/>
+          <p:cNvSpPr txBox="1"/>
+          <p:nvPr/>
+        </p:nvSpPr>
+        <p:spPr>
+          <a:xfrm>
+            <a:off x="658368" y="1938528"/>
+            <a:ext cx="2377440" cy="548640"/>
+          </a:xfrm>
+          <a:prstGeom prst="rect">
+            <a:avLst/>
+          </a:prstGeom>
+          <a:noFill/>
+        </p:spPr>
+        <p:txBody>
+          <a:bodyPr wrap="square" anchor="ctr">
+            <a:spAutoFit/>
+          </a:bodyPr>
+          <a:lstStyle/>
+          <a:p>
+            <a:r>
+              <a:rPr sz="1400" b="1" i="0">
+                <a:solidFill>
+                  <a:srgbClr val="1A1A1A"/>
+                </a:solidFill>
+                <a:latin typeface="Arial"/>
+              </a:rPr>
+              <a:t>Build its own</a:t>
+            </a:r>
+          </a:p>
+        </p:txBody>
+      </p:sp>
+      <p:sp>
+        <p:nvSpPr>
+          <p:cNvPr id="6" name="Rectangle 5"/>
           <p:cNvSpPr/>
           <p:nvPr/>
         </p:nvSpPr>
         <p:spPr>
           <a:xfrm>
-            <a:off x="658368" y="1554480"/>
-            <a:ext cx="5394960" cy="3977639"/>
-          </a:xfrm>
-          <a:prstGeom prst="roundRect">
-            <a:avLst>
-              <a:gd name="adj" fmla="val 4500"/>
-            </a:avLst>
+            <a:off x="3172968" y="1993392"/>
+            <a:ext cx="1813255" cy="438912"/>
+          </a:xfrm>
+          <a:prstGeom prst="rect">
+            <a:avLst/>
           </a:prstGeom>
           <a:solidFill>
-            <a:srgbClr val="E5F5FB"/>
+            <a:srgbClr val="009CD6"/>
           </a:solidFill>
-          <a:ln>
-            <a:noFill/>
+          <a:ln w="9525">
+            <a:solidFill>
+              <a:srgbClr val="FFFFFF"/>
+            </a:solidFill>
           </a:ln>
           <a:effectLst/>
         </p:spPr>
@@ -12643,23 +12717,32 @@
           </a:fontRef>
         </p:style>
         <p:txBody>
-          <a:bodyPr rtlCol="0" anchor="ctr"/>
+          <a:bodyPr rtlCol="0" anchor="ctr" lIns="54864" rIns="54864" tIns="0" bIns="0" wrap="square"/>
           <a:lstStyle/>
           <a:p>
             <a:pPr algn="ctr"/>
-          </a:p>
-        </p:txBody>
-      </p:sp>
-      <p:sp>
-        <p:nvSpPr>
-          <p:cNvPr id="5" name="TextBox 4"/>
+            <a:r>
+              <a:rPr sz="1100" b="1" i="0">
+                <a:solidFill>
+                  <a:srgbClr val="FFFFFF"/>
+                </a:solidFill>
+                <a:latin typeface="Arial"/>
+              </a:rPr>
+              <a:t>cheaper, faster</a:t>
+            </a:r>
+          </a:p>
+        </p:txBody>
+      </p:sp>
+      <p:sp>
+        <p:nvSpPr>
+          <p:cNvPr id="7" name="TextBox 6"/>
           <p:cNvSpPr txBox="1"/>
           <p:nvPr/>
         </p:nvSpPr>
         <p:spPr>
           <a:xfrm>
-            <a:off x="859536" y="1700784"/>
-            <a:ext cx="4992624" cy="3703320"/>
+            <a:off x="5105095" y="1938528"/>
+            <a:ext cx="6434632" cy="548640"/>
           </a:xfrm>
           <a:prstGeom prst="rect">
             <a:avLst/>
@@ -12667,116 +12750,828 @@
           <a:noFill/>
         </p:spPr>
         <p:txBody>
+          <a:bodyPr wrap="square" anchor="ctr">
+            <a:spAutoFit/>
+          </a:bodyPr>
+          <a:lstStyle/>
+          <a:p>
+            <a:r>
+              <a:rPr sz="1200" b="0" i="1">
+                <a:solidFill>
+                  <a:srgbClr val="595959"/>
+                </a:solidFill>
+                <a:latin typeface="Arial"/>
+              </a:rPr>
+              <a:t>so every project builds its own</a:t>
+            </a:r>
+          </a:p>
+        </p:txBody>
+      </p:sp>
+      <p:sp>
+        <p:nvSpPr>
+          <p:cNvPr id="8" name="TextBox 7"/>
+          <p:cNvSpPr txBox="1"/>
+          <p:nvPr/>
+        </p:nvSpPr>
+        <p:spPr>
+          <a:xfrm>
+            <a:off x="658368" y="2761488"/>
+            <a:ext cx="2377440" cy="548640"/>
+          </a:xfrm>
+          <a:prstGeom prst="rect">
+            <a:avLst/>
+          </a:prstGeom>
+          <a:noFill/>
+        </p:spPr>
+        <p:txBody>
+          <a:bodyPr wrap="square" anchor="ctr">
+            <a:spAutoFit/>
+          </a:bodyPr>
+          <a:lstStyle/>
+          <a:p>
+            <a:r>
+              <a:rPr sz="1400" b="1" i="0">
+                <a:solidFill>
+                  <a:srgbClr val="1A1A1A"/>
+                </a:solidFill>
+                <a:latin typeface="Arial"/>
+              </a:rPr>
+              <a:t>Reuse the national one</a:t>
+            </a:r>
+          </a:p>
+        </p:txBody>
+      </p:sp>
+      <p:sp>
+        <p:nvSpPr>
+          <p:cNvPr id="9" name="Rectangle 8"/>
+          <p:cNvSpPr/>
+          <p:nvPr/>
+        </p:nvSpPr>
+        <p:spPr>
+          <a:xfrm>
+            <a:off x="3172968" y="2816352"/>
+            <a:ext cx="2817266" cy="438912"/>
+          </a:xfrm>
+          <a:prstGeom prst="rect">
+            <a:avLst/>
+          </a:prstGeom>
+          <a:solidFill>
+            <a:srgbClr val="F2F2F2"/>
+          </a:solidFill>
+          <a:ln w="9525">
+            <a:solidFill>
+              <a:srgbClr val="FFFFFF"/>
+            </a:solidFill>
+          </a:ln>
+          <a:effectLst/>
+        </p:spPr>
+        <p:style>
+          <a:lnRef idx="1">
+            <a:schemeClr val="accent1"/>
+          </a:lnRef>
+          <a:fillRef idx="3">
+            <a:schemeClr val="accent1"/>
+          </a:fillRef>
+          <a:effectRef idx="2">
+            <a:schemeClr val="accent1"/>
+          </a:effectRef>
+          <a:fontRef idx="minor">
+            <a:schemeClr val="lt1"/>
+          </a:fontRef>
+        </p:style>
+        <p:txBody>
+          <a:bodyPr rtlCol="0" anchor="ctr" lIns="54864" rIns="54864" tIns="0" bIns="0" wrap="square"/>
+          <a:lstStyle/>
+          <a:p>
+            <a:pPr algn="ctr"/>
+            <a:r>
+              <a:rPr sz="1100" b="1" i="0">
+                <a:solidFill>
+                  <a:srgbClr val="1A1A1A"/>
+                </a:solidFill>
+                <a:latin typeface="Arial"/>
+              </a:rPr>
+              <a:t>learn it · negotiate · wait</a:t>
+            </a:r>
+          </a:p>
+        </p:txBody>
+      </p:sp>
+      <p:sp>
+        <p:nvSpPr>
+          <p:cNvPr id="10" name="TextBox 9"/>
+          <p:cNvSpPr txBox="1"/>
+          <p:nvPr/>
+        </p:nvSpPr>
+        <p:spPr>
+          <a:xfrm>
+            <a:off x="658368" y="3584448"/>
+            <a:ext cx="10881360" cy="329184"/>
+          </a:xfrm>
+          <a:prstGeom prst="rect">
+            <a:avLst/>
+          </a:prstGeom>
+          <a:noFill/>
+        </p:spPr>
+        <p:txBody>
           <a:bodyPr wrap="square">
             <a:spAutoFit/>
           </a:bodyPr>
           <a:lstStyle/>
           <a:p>
-            <a:pPr>
-              <a:spcAft>
-                <a:spcPts val="700"/>
-              </a:spcAft>
-            </a:pPr>
-            <a:r>
-              <a:rPr sz="1900" b="1" i="0">
+            <a:r>
+              <a:rPr sz="1200" b="1" i="0">
+                <a:solidFill>
+                  <a:srgbClr val="595959"/>
+                </a:solidFill>
+                <a:latin typeface="Arial"/>
+              </a:rPr>
+              <a:t>ACROSS TEN PROJECTS — the column no single project ever sees</a:t>
+            </a:r>
+          </a:p>
+        </p:txBody>
+      </p:sp>
+      <p:sp>
+        <p:nvSpPr>
+          <p:cNvPr id="11" name="TextBox 10"/>
+          <p:cNvSpPr txBox="1"/>
+          <p:nvPr/>
+        </p:nvSpPr>
+        <p:spPr>
+          <a:xfrm>
+            <a:off x="658368" y="3968496"/>
+            <a:ext cx="2377440" cy="548640"/>
+          </a:xfrm>
+          <a:prstGeom prst="rect">
+            <a:avLst/>
+          </a:prstGeom>
+          <a:noFill/>
+        </p:spPr>
+        <p:txBody>
+          <a:bodyPr wrap="square" anchor="ctr">
+            <a:spAutoFit/>
+          </a:bodyPr>
+          <a:lstStyle/>
+          <a:p>
+            <a:r>
+              <a:rPr sz="1400" b="1" i="0">
+                <a:solidFill>
+                  <a:srgbClr val="1A1A1A"/>
+                </a:solidFill>
+                <a:latin typeface="Arial"/>
+              </a:rPr>
+              <a:t>Each builds its own</a:t>
+            </a:r>
+          </a:p>
+        </p:txBody>
+      </p:sp>
+      <p:sp>
+        <p:nvSpPr>
+          <p:cNvPr id="12" name="Rectangle 11"/>
+          <p:cNvSpPr/>
+          <p:nvPr/>
+        </p:nvSpPr>
+        <p:spPr>
+          <a:xfrm>
+            <a:off x="3172968" y="4023359"/>
+            <a:ext cx="683742" cy="438912"/>
+          </a:xfrm>
+          <a:prstGeom prst="rect">
+            <a:avLst/>
+          </a:prstGeom>
+          <a:solidFill>
+            <a:srgbClr val="009CD6"/>
+          </a:solidFill>
+          <a:ln w="9525">
+            <a:solidFill>
+              <a:srgbClr val="FFFFFF"/>
+            </a:solidFill>
+          </a:ln>
+          <a:effectLst/>
+        </p:spPr>
+        <p:style>
+          <a:lnRef idx="1">
+            <a:schemeClr val="accent1"/>
+          </a:lnRef>
+          <a:fillRef idx="3">
+            <a:schemeClr val="accent1"/>
+          </a:fillRef>
+          <a:effectRef idx="2">
+            <a:schemeClr val="accent1"/>
+          </a:effectRef>
+          <a:fontRef idx="minor">
+            <a:schemeClr val="lt1"/>
+          </a:fontRef>
+        </p:style>
+        <p:txBody>
+          <a:bodyPr rtlCol="0" anchor="ctr"/>
+          <a:lstStyle/>
+          <a:p>
+            <a:pPr algn="ctr"/>
+          </a:p>
+        </p:txBody>
+      </p:sp>
+      <p:sp>
+        <p:nvSpPr>
+          <p:cNvPr id="13" name="Rectangle 12"/>
+          <p:cNvSpPr/>
+          <p:nvPr/>
+        </p:nvSpPr>
+        <p:spPr>
+          <a:xfrm>
+            <a:off x="3884142" y="4023359"/>
+            <a:ext cx="683742" cy="438912"/>
+          </a:xfrm>
+          <a:prstGeom prst="rect">
+            <a:avLst/>
+          </a:prstGeom>
+          <a:solidFill>
+            <a:srgbClr val="009CD6"/>
+          </a:solidFill>
+          <a:ln w="9525">
+            <a:solidFill>
+              <a:srgbClr val="FFFFFF"/>
+            </a:solidFill>
+          </a:ln>
+          <a:effectLst/>
+        </p:spPr>
+        <p:style>
+          <a:lnRef idx="1">
+            <a:schemeClr val="accent1"/>
+          </a:lnRef>
+          <a:fillRef idx="3">
+            <a:schemeClr val="accent1"/>
+          </a:fillRef>
+          <a:effectRef idx="2">
+            <a:schemeClr val="accent1"/>
+          </a:effectRef>
+          <a:fontRef idx="minor">
+            <a:schemeClr val="lt1"/>
+          </a:fontRef>
+        </p:style>
+        <p:txBody>
+          <a:bodyPr rtlCol="0" anchor="ctr"/>
+          <a:lstStyle/>
+          <a:p>
+            <a:pPr algn="ctr"/>
+          </a:p>
+        </p:txBody>
+      </p:sp>
+      <p:sp>
+        <p:nvSpPr>
+          <p:cNvPr id="14" name="Rectangle 13"/>
+          <p:cNvSpPr/>
+          <p:nvPr/>
+        </p:nvSpPr>
+        <p:spPr>
+          <a:xfrm>
+            <a:off x="4595317" y="4023359"/>
+            <a:ext cx="683742" cy="438912"/>
+          </a:xfrm>
+          <a:prstGeom prst="rect">
+            <a:avLst/>
+          </a:prstGeom>
+          <a:solidFill>
+            <a:srgbClr val="009CD6"/>
+          </a:solidFill>
+          <a:ln w="9525">
+            <a:solidFill>
+              <a:srgbClr val="FFFFFF"/>
+            </a:solidFill>
+          </a:ln>
+          <a:effectLst/>
+        </p:spPr>
+        <p:style>
+          <a:lnRef idx="1">
+            <a:schemeClr val="accent1"/>
+          </a:lnRef>
+          <a:fillRef idx="3">
+            <a:schemeClr val="accent1"/>
+          </a:fillRef>
+          <a:effectRef idx="2">
+            <a:schemeClr val="accent1"/>
+          </a:effectRef>
+          <a:fontRef idx="minor">
+            <a:schemeClr val="lt1"/>
+          </a:fontRef>
+        </p:style>
+        <p:txBody>
+          <a:bodyPr rtlCol="0" anchor="ctr"/>
+          <a:lstStyle/>
+          <a:p>
+            <a:pPr algn="ctr"/>
+          </a:p>
+        </p:txBody>
+      </p:sp>
+      <p:sp>
+        <p:nvSpPr>
+          <p:cNvPr id="15" name="Rectangle 14"/>
+          <p:cNvSpPr/>
+          <p:nvPr/>
+        </p:nvSpPr>
+        <p:spPr>
+          <a:xfrm>
+            <a:off x="5306491" y="4023359"/>
+            <a:ext cx="683742" cy="438912"/>
+          </a:xfrm>
+          <a:prstGeom prst="rect">
+            <a:avLst/>
+          </a:prstGeom>
+          <a:solidFill>
+            <a:srgbClr val="009CD6"/>
+          </a:solidFill>
+          <a:ln w="9525">
+            <a:solidFill>
+              <a:srgbClr val="FFFFFF"/>
+            </a:solidFill>
+          </a:ln>
+          <a:effectLst/>
+        </p:spPr>
+        <p:style>
+          <a:lnRef idx="1">
+            <a:schemeClr val="accent1"/>
+          </a:lnRef>
+          <a:fillRef idx="3">
+            <a:schemeClr val="accent1"/>
+          </a:fillRef>
+          <a:effectRef idx="2">
+            <a:schemeClr val="accent1"/>
+          </a:effectRef>
+          <a:fontRef idx="minor">
+            <a:schemeClr val="lt1"/>
+          </a:fontRef>
+        </p:style>
+        <p:txBody>
+          <a:bodyPr rtlCol="0" anchor="ctr"/>
+          <a:lstStyle/>
+          <a:p>
+            <a:pPr algn="ctr"/>
+          </a:p>
+        </p:txBody>
+      </p:sp>
+      <p:sp>
+        <p:nvSpPr>
+          <p:cNvPr id="16" name="Rectangle 15"/>
+          <p:cNvSpPr/>
+          <p:nvPr/>
+        </p:nvSpPr>
+        <p:spPr>
+          <a:xfrm>
+            <a:off x="6017666" y="4023359"/>
+            <a:ext cx="683742" cy="438912"/>
+          </a:xfrm>
+          <a:prstGeom prst="rect">
+            <a:avLst/>
+          </a:prstGeom>
+          <a:solidFill>
+            <a:srgbClr val="009CD6"/>
+          </a:solidFill>
+          <a:ln w="9525">
+            <a:solidFill>
+              <a:srgbClr val="FFFFFF"/>
+            </a:solidFill>
+          </a:ln>
+          <a:effectLst/>
+        </p:spPr>
+        <p:style>
+          <a:lnRef idx="1">
+            <a:schemeClr val="accent1"/>
+          </a:lnRef>
+          <a:fillRef idx="3">
+            <a:schemeClr val="accent1"/>
+          </a:fillRef>
+          <a:effectRef idx="2">
+            <a:schemeClr val="accent1"/>
+          </a:effectRef>
+          <a:fontRef idx="minor">
+            <a:schemeClr val="lt1"/>
+          </a:fontRef>
+        </p:style>
+        <p:txBody>
+          <a:bodyPr rtlCol="0" anchor="ctr"/>
+          <a:lstStyle/>
+          <a:p>
+            <a:pPr algn="ctr"/>
+          </a:p>
+        </p:txBody>
+      </p:sp>
+      <p:sp>
+        <p:nvSpPr>
+          <p:cNvPr id="17" name="Rectangle 16"/>
+          <p:cNvSpPr/>
+          <p:nvPr/>
+        </p:nvSpPr>
+        <p:spPr>
+          <a:xfrm>
+            <a:off x="6728841" y="4023359"/>
+            <a:ext cx="683742" cy="438912"/>
+          </a:xfrm>
+          <a:prstGeom prst="rect">
+            <a:avLst/>
+          </a:prstGeom>
+          <a:solidFill>
+            <a:srgbClr val="009CD6"/>
+          </a:solidFill>
+          <a:ln w="9525">
+            <a:solidFill>
+              <a:srgbClr val="FFFFFF"/>
+            </a:solidFill>
+          </a:ln>
+          <a:effectLst/>
+        </p:spPr>
+        <p:style>
+          <a:lnRef idx="1">
+            <a:schemeClr val="accent1"/>
+          </a:lnRef>
+          <a:fillRef idx="3">
+            <a:schemeClr val="accent1"/>
+          </a:fillRef>
+          <a:effectRef idx="2">
+            <a:schemeClr val="accent1"/>
+          </a:effectRef>
+          <a:fontRef idx="minor">
+            <a:schemeClr val="lt1"/>
+          </a:fontRef>
+        </p:style>
+        <p:txBody>
+          <a:bodyPr rtlCol="0" anchor="ctr"/>
+          <a:lstStyle/>
+          <a:p>
+            <a:pPr algn="ctr"/>
+          </a:p>
+        </p:txBody>
+      </p:sp>
+      <p:sp>
+        <p:nvSpPr>
+          <p:cNvPr id="18" name="Rectangle 17"/>
+          <p:cNvSpPr/>
+          <p:nvPr/>
+        </p:nvSpPr>
+        <p:spPr>
+          <a:xfrm>
+            <a:off x="7440015" y="4023359"/>
+            <a:ext cx="683742" cy="438912"/>
+          </a:xfrm>
+          <a:prstGeom prst="rect">
+            <a:avLst/>
+          </a:prstGeom>
+          <a:solidFill>
+            <a:srgbClr val="009CD6"/>
+          </a:solidFill>
+          <a:ln w="9525">
+            <a:solidFill>
+              <a:srgbClr val="FFFFFF"/>
+            </a:solidFill>
+          </a:ln>
+          <a:effectLst/>
+        </p:spPr>
+        <p:style>
+          <a:lnRef idx="1">
+            <a:schemeClr val="accent1"/>
+          </a:lnRef>
+          <a:fillRef idx="3">
+            <a:schemeClr val="accent1"/>
+          </a:fillRef>
+          <a:effectRef idx="2">
+            <a:schemeClr val="accent1"/>
+          </a:effectRef>
+          <a:fontRef idx="minor">
+            <a:schemeClr val="lt1"/>
+          </a:fontRef>
+        </p:style>
+        <p:txBody>
+          <a:bodyPr rtlCol="0" anchor="ctr"/>
+          <a:lstStyle/>
+          <a:p>
+            <a:pPr algn="ctr"/>
+          </a:p>
+        </p:txBody>
+      </p:sp>
+      <p:sp>
+        <p:nvSpPr>
+          <p:cNvPr id="19" name="Rectangle 18"/>
+          <p:cNvSpPr/>
+          <p:nvPr/>
+        </p:nvSpPr>
+        <p:spPr>
+          <a:xfrm>
+            <a:off x="8151190" y="4023359"/>
+            <a:ext cx="683742" cy="438912"/>
+          </a:xfrm>
+          <a:prstGeom prst="rect">
+            <a:avLst/>
+          </a:prstGeom>
+          <a:solidFill>
+            <a:srgbClr val="009CD6"/>
+          </a:solidFill>
+          <a:ln w="9525">
+            <a:solidFill>
+              <a:srgbClr val="FFFFFF"/>
+            </a:solidFill>
+          </a:ln>
+          <a:effectLst/>
+        </p:spPr>
+        <p:style>
+          <a:lnRef idx="1">
+            <a:schemeClr val="accent1"/>
+          </a:lnRef>
+          <a:fillRef idx="3">
+            <a:schemeClr val="accent1"/>
+          </a:fillRef>
+          <a:effectRef idx="2">
+            <a:schemeClr val="accent1"/>
+          </a:effectRef>
+          <a:fontRef idx="minor">
+            <a:schemeClr val="lt1"/>
+          </a:fontRef>
+        </p:style>
+        <p:txBody>
+          <a:bodyPr rtlCol="0" anchor="ctr"/>
+          <a:lstStyle/>
+          <a:p>
+            <a:pPr algn="ctr"/>
+          </a:p>
+        </p:txBody>
+      </p:sp>
+      <p:sp>
+        <p:nvSpPr>
+          <p:cNvPr id="20" name="Rectangle 19"/>
+          <p:cNvSpPr/>
+          <p:nvPr/>
+        </p:nvSpPr>
+        <p:spPr>
+          <a:xfrm>
+            <a:off x="8862364" y="4023359"/>
+            <a:ext cx="683742" cy="438912"/>
+          </a:xfrm>
+          <a:prstGeom prst="rect">
+            <a:avLst/>
+          </a:prstGeom>
+          <a:solidFill>
+            <a:srgbClr val="009CD6"/>
+          </a:solidFill>
+          <a:ln w="9525">
+            <a:solidFill>
+              <a:srgbClr val="FFFFFF"/>
+            </a:solidFill>
+          </a:ln>
+          <a:effectLst/>
+        </p:spPr>
+        <p:style>
+          <a:lnRef idx="1">
+            <a:schemeClr val="accent1"/>
+          </a:lnRef>
+          <a:fillRef idx="3">
+            <a:schemeClr val="accent1"/>
+          </a:fillRef>
+          <a:effectRef idx="2">
+            <a:schemeClr val="accent1"/>
+          </a:effectRef>
+          <a:fontRef idx="minor">
+            <a:schemeClr val="lt1"/>
+          </a:fontRef>
+        </p:style>
+        <p:txBody>
+          <a:bodyPr rtlCol="0" anchor="ctr"/>
+          <a:lstStyle/>
+          <a:p>
+            <a:pPr algn="ctr"/>
+          </a:p>
+        </p:txBody>
+      </p:sp>
+      <p:sp>
+        <p:nvSpPr>
+          <p:cNvPr id="21" name="Rectangle 20"/>
+          <p:cNvSpPr/>
+          <p:nvPr/>
+        </p:nvSpPr>
+        <p:spPr>
+          <a:xfrm>
+            <a:off x="9573539" y="4023359"/>
+            <a:ext cx="683742" cy="438912"/>
+          </a:xfrm>
+          <a:prstGeom prst="rect">
+            <a:avLst/>
+          </a:prstGeom>
+          <a:solidFill>
+            <a:srgbClr val="009CD6"/>
+          </a:solidFill>
+          <a:ln w="9525">
+            <a:solidFill>
+              <a:srgbClr val="FFFFFF"/>
+            </a:solidFill>
+          </a:ln>
+          <a:effectLst/>
+        </p:spPr>
+        <p:style>
+          <a:lnRef idx="1">
+            <a:schemeClr val="accent1"/>
+          </a:lnRef>
+          <a:fillRef idx="3">
+            <a:schemeClr val="accent1"/>
+          </a:fillRef>
+          <a:effectRef idx="2">
+            <a:schemeClr val="accent1"/>
+          </a:effectRef>
+          <a:fontRef idx="minor">
+            <a:schemeClr val="lt1"/>
+          </a:fontRef>
+        </p:style>
+        <p:txBody>
+          <a:bodyPr rtlCol="0" anchor="ctr"/>
+          <a:lstStyle/>
+          <a:p>
+            <a:pPr algn="ctr"/>
+          </a:p>
+        </p:txBody>
+      </p:sp>
+      <p:sp>
+        <p:nvSpPr>
+          <p:cNvPr id="22" name="TextBox 21"/>
+          <p:cNvSpPr txBox="1"/>
+          <p:nvPr/>
+        </p:nvSpPr>
+        <p:spPr>
+          <a:xfrm>
+            <a:off x="10376153" y="3968496"/>
+            <a:ext cx="1163574" cy="548640"/>
+          </a:xfrm>
+          <a:prstGeom prst="rect">
+            <a:avLst/>
+          </a:prstGeom>
+          <a:noFill/>
+        </p:spPr>
+        <p:txBody>
+          <a:bodyPr wrap="square" anchor="ctr">
+            <a:spAutoFit/>
+          </a:bodyPr>
+          <a:lstStyle/>
+          <a:p>
+            <a:r>
+              <a:rPr sz="1200" b="0" i="1">
+                <a:solidFill>
+                  <a:srgbClr val="595959"/>
+                </a:solidFill>
+                <a:latin typeface="Arial"/>
+              </a:rPr>
+              <a:t>paid ten times for identity</a:t>
+            </a:r>
+          </a:p>
+        </p:txBody>
+      </p:sp>
+      <p:sp>
+        <p:nvSpPr>
+          <p:cNvPr id="23" name="TextBox 22"/>
+          <p:cNvSpPr txBox="1"/>
+          <p:nvPr/>
+        </p:nvSpPr>
+        <p:spPr>
+          <a:xfrm>
+            <a:off x="658368" y="4791456"/>
+            <a:ext cx="2377440" cy="548640"/>
+          </a:xfrm>
+          <a:prstGeom prst="rect">
+            <a:avLst/>
+          </a:prstGeom>
+          <a:noFill/>
+        </p:spPr>
+        <p:txBody>
+          <a:bodyPr wrap="square" anchor="ctr">
+            <a:spAutoFit/>
+          </a:bodyPr>
+          <a:lstStyle/>
+          <a:p>
+            <a:r>
+              <a:rPr sz="1400" b="1" i="0">
+                <a:solidFill>
+                  <a:srgbClr val="1A1A1A"/>
+                </a:solidFill>
+                <a:latin typeface="Arial"/>
+              </a:rPr>
+              <a:t>Build once, consume ×9</a:t>
+            </a:r>
+          </a:p>
+        </p:txBody>
+      </p:sp>
+      <p:sp>
+        <p:nvSpPr>
+          <p:cNvPr id="24" name="Rectangle 23"/>
+          <p:cNvSpPr/>
+          <p:nvPr/>
+        </p:nvSpPr>
+        <p:spPr>
+          <a:xfrm>
+            <a:off x="3172968" y="4846320"/>
+            <a:ext cx="1813255" cy="438912"/>
+          </a:xfrm>
+          <a:prstGeom prst="rect">
+            <a:avLst/>
+          </a:prstGeom>
+          <a:solidFill>
+            <a:srgbClr val="009CD6"/>
+          </a:solidFill>
+          <a:ln w="9525">
+            <a:solidFill>
+              <a:srgbClr val="FFFFFF"/>
+            </a:solidFill>
+          </a:ln>
+          <a:effectLst/>
+        </p:spPr>
+        <p:style>
+          <a:lnRef idx="1">
+            <a:schemeClr val="accent1"/>
+          </a:lnRef>
+          <a:fillRef idx="3">
+            <a:schemeClr val="accent1"/>
+          </a:fillRef>
+          <a:effectRef idx="2">
+            <a:schemeClr val="accent1"/>
+          </a:effectRef>
+          <a:fontRef idx="minor">
+            <a:schemeClr val="lt1"/>
+          </a:fontRef>
+        </p:style>
+        <p:txBody>
+          <a:bodyPr rtlCol="0" anchor="ctr" lIns="54864" rIns="54864" tIns="0" bIns="0" wrap="square"/>
+          <a:lstStyle/>
+          <a:p>
+            <a:pPr algn="ctr"/>
+            <a:r>
+              <a:rPr sz="1100" b="1" i="0">
+                <a:solidFill>
+                  <a:srgbClr val="FFFFFF"/>
+                </a:solidFill>
+                <a:latin typeface="Arial"/>
+              </a:rPr>
+              <a:t>build once</a:t>
+            </a:r>
+          </a:p>
+        </p:txBody>
+      </p:sp>
+      <p:sp>
+        <p:nvSpPr>
+          <p:cNvPr id="25" name="Rectangle 24"/>
+          <p:cNvSpPr/>
+          <p:nvPr/>
+        </p:nvSpPr>
+        <p:spPr>
+          <a:xfrm>
+            <a:off x="5013655" y="4846320"/>
+            <a:ext cx="1311249" cy="438912"/>
+          </a:xfrm>
+          <a:prstGeom prst="rect">
+            <a:avLst/>
+          </a:prstGeom>
+          <a:solidFill>
+            <a:srgbClr val="E5F5FB"/>
+          </a:solidFill>
+          <a:ln w="9525">
+            <a:solidFill>
+              <a:srgbClr val="FFFFFF"/>
+            </a:solidFill>
+          </a:ln>
+          <a:effectLst/>
+        </p:spPr>
+        <p:style>
+          <a:lnRef idx="1">
+            <a:schemeClr val="accent1"/>
+          </a:lnRef>
+          <a:fillRef idx="3">
+            <a:schemeClr val="accent1"/>
+          </a:fillRef>
+          <a:effectRef idx="2">
+            <a:schemeClr val="accent1"/>
+          </a:effectRef>
+          <a:fontRef idx="minor">
+            <a:schemeClr val="lt1"/>
+          </a:fontRef>
+        </p:style>
+        <p:txBody>
+          <a:bodyPr rtlCol="0" anchor="ctr" lIns="54864" rIns="54864" tIns="0" bIns="0" wrap="square"/>
+          <a:lstStyle/>
+          <a:p>
+            <a:pPr algn="ctr"/>
+            <a:r>
+              <a:rPr sz="1100" b="1" i="0">
                 <a:solidFill>
                   <a:srgbClr val="006E96"/>
                 </a:solidFill>
                 <a:latin typeface="Arial"/>
               </a:rPr>
-              <a:t>INSIDE ONE PROJECT</a:t>
-            </a:r>
-          </a:p>
-          <a:p>
-            <a:pPr>
-              <a:spcAft>
-                <a:spcPts val="700"/>
-              </a:spcAft>
-            </a:pPr>
-            <a:r>
-              <a:rPr sz="1600" b="0" i="0">
-                <a:solidFill>
-                  <a:srgbClr val="1A1A1A"/>
-                </a:solidFill>
-                <a:latin typeface="Arial"/>
-              </a:rPr>
-              <a:t>Building its own small identity function is cheaper and faster than reusing the national one.</a:t>
-            </a:r>
-          </a:p>
-          <a:p>
-            <a:pPr>
-              <a:spcAft>
-                <a:spcPts val="700"/>
-              </a:spcAft>
-            </a:pPr>
-            <a:r>
-              <a:rPr sz="1600" b="0" i="0">
-                <a:solidFill>
-                  <a:srgbClr val="1A1A1A"/>
-                </a:solidFill>
-                <a:latin typeface="Arial"/>
-              </a:rPr>
-              <a:t>So every project builds its own.</a:t>
-            </a:r>
-          </a:p>
-        </p:txBody>
-      </p:sp>
-      <p:sp>
-        <p:nvSpPr>
-          <p:cNvPr id="6" name="Rounded Rectangle 5"/>
-          <p:cNvSpPr/>
-          <p:nvPr/>
-        </p:nvSpPr>
-        <p:spPr>
-          <a:xfrm>
-            <a:off x="6263640" y="1554480"/>
-            <a:ext cx="5394960" cy="3977639"/>
-          </a:xfrm>
-          <a:prstGeom prst="roundRect">
-            <a:avLst>
-              <a:gd name="adj" fmla="val 4500"/>
-            </a:avLst>
-          </a:prstGeom>
-          <a:solidFill>
-            <a:srgbClr val="F2F2F2"/>
-          </a:solidFill>
-          <a:ln>
-            <a:noFill/>
-          </a:ln>
-          <a:effectLst/>
-        </p:spPr>
-        <p:style>
-          <a:lnRef idx="1">
-            <a:schemeClr val="accent1"/>
-          </a:lnRef>
-          <a:fillRef idx="3">
-            <a:schemeClr val="accent1"/>
-          </a:fillRef>
-          <a:effectRef idx="2">
-            <a:schemeClr val="accent1"/>
-          </a:effectRef>
-          <a:fontRef idx="minor">
-            <a:schemeClr val="lt1"/>
-          </a:fontRef>
-        </p:style>
-        <p:txBody>
-          <a:bodyPr rtlCol="0" anchor="ctr"/>
-          <a:lstStyle/>
-          <a:p>
-            <a:pPr algn="ctr"/>
-          </a:p>
-        </p:txBody>
-      </p:sp>
-      <p:sp>
-        <p:nvSpPr>
-          <p:cNvPr id="7" name="TextBox 6"/>
+              <a:t>nine consume</a:t>
+            </a:r>
+          </a:p>
+        </p:txBody>
+      </p:sp>
+      <p:sp>
+        <p:nvSpPr>
+          <p:cNvPr id="26" name="TextBox 25"/>
           <p:cNvSpPr txBox="1"/>
           <p:nvPr/>
         </p:nvSpPr>
         <p:spPr>
           <a:xfrm>
-            <a:off x="6464808" y="1700784"/>
-            <a:ext cx="4992624" cy="3703320"/>
+            <a:off x="6443776" y="4791456"/>
+            <a:ext cx="5095951" cy="548640"/>
           </a:xfrm>
           <a:prstGeom prst="rect">
             <a:avLst/>
@@ -12784,69 +13579,32 @@
           <a:noFill/>
         </p:spPr>
         <p:txBody>
-          <a:bodyPr wrap="square">
+          <a:bodyPr wrap="square" anchor="ctr">
             <a:spAutoFit/>
           </a:bodyPr>
           <a:lstStyle/>
           <a:p>
-            <a:pPr>
-              <a:spcAft>
-                <a:spcPts val="700"/>
-              </a:spcAft>
-            </a:pPr>
-            <a:r>
-              <a:rPr sz="1900" b="1" i="0">
+            <a:r>
+              <a:rPr sz="1200" b="0" i="1">
                 <a:solidFill>
-                  <a:srgbClr val="006E96"/>
+                  <a:srgbClr val="595959"/>
                 </a:solidFill>
                 <a:latin typeface="Arial"/>
               </a:rPr>
-              <a:t>ACROSS TEN PROJECTS</a:t>
-            </a:r>
-          </a:p>
-          <a:p>
-            <a:pPr>
-              <a:spcAft>
-                <a:spcPts val="700"/>
-              </a:spcAft>
-            </a:pPr>
-            <a:r>
-              <a:rPr sz="1600" b="0" i="0">
-                <a:solidFill>
-                  <a:srgbClr val="1A1A1A"/>
-                </a:solidFill>
-                <a:latin typeface="Arial"/>
-              </a:rPr>
-              <a:t>The country has paid ten times for identity.</a:t>
-            </a:r>
-          </a:p>
-          <a:p>
-            <a:pPr>
-              <a:spcAft>
-                <a:spcPts val="700"/>
-              </a:spcAft>
-            </a:pPr>
-            <a:r>
-              <a:rPr sz="1600" b="0" i="0">
-                <a:solidFill>
-                  <a:srgbClr val="1A1A1A"/>
-                </a:solidFill>
-                <a:latin typeface="Arial"/>
-              </a:rPr>
-              <a:t>The citizen proves who they are on paper at every counter.</a:t>
-            </a:r>
-          </a:p>
-        </p:txBody>
-      </p:sp>
-      <p:sp>
-        <p:nvSpPr>
-          <p:cNvPr id="8" name="TextBox 7"/>
+              <a:t>the citizen proves who they are once</a:t>
+            </a:r>
+          </a:p>
+        </p:txBody>
+      </p:sp>
+      <p:sp>
+        <p:nvSpPr>
+          <p:cNvPr id="27" name="TextBox 26"/>
           <p:cNvSpPr txBox="1"/>
           <p:nvPr/>
         </p:nvSpPr>
         <p:spPr>
           <a:xfrm>
-            <a:off x="658368" y="5715000"/>
+            <a:off x="658368" y="5760720"/>
             <a:ext cx="10881360" cy="548640"/>
           </a:xfrm>
           <a:prstGeom prst="rect">
@@ -12874,7 +13632,7 @@
       </p:sp>
       <p:sp>
         <p:nvSpPr>
-          <p:cNvPr id="9" name="TextBox 8"/>
+          <p:cNvPr id="28" name="TextBox 27"/>
           <p:cNvSpPr txBox="1"/>
           <p:nvPr/>
         </p:nvSpPr>
@@ -13587,7 +14345,7 @@
         <p:spPr>
           <a:xfrm>
             <a:off x="658368" y="1600200"/>
-            <a:ext cx="10881360" cy="2651760"/>
+            <a:ext cx="10881360" cy="2295144"/>
           </a:xfrm>
           <a:prstGeom prst="rect">
             <a:avLst/>
@@ -13641,7 +14399,7 @@
         </p:nvSpPr>
         <p:spPr>
           <a:xfrm>
-            <a:off x="658368" y="4434840"/>
+            <a:off x="658368" y="4078224"/>
             <a:ext cx="10881360" cy="1325880"/>
           </a:xfrm>
           <a:prstGeom prst="roundRect">
@@ -13687,7 +14445,7 @@
         </p:nvSpPr>
         <p:spPr>
           <a:xfrm>
-            <a:off x="859536" y="4626864"/>
+            <a:off x="859536" y="4270248"/>
             <a:ext cx="10479024" cy="1051560"/>
           </a:xfrm>
           <a:prstGeom prst="rect">
@@ -13857,7 +14615,7 @@
         <p:spPr>
           <a:xfrm>
             <a:off x="658368" y="1600200"/>
-            <a:ext cx="10881360" cy="2651760"/>
+            <a:ext cx="10881360" cy="1984248"/>
           </a:xfrm>
           <a:prstGeom prst="rect">
             <a:avLst/>
@@ -13911,7 +14669,7 @@
         </p:nvSpPr>
         <p:spPr>
           <a:xfrm>
-            <a:off x="658368" y="4434840"/>
+            <a:off x="658368" y="3767328"/>
             <a:ext cx="10881360" cy="1325880"/>
           </a:xfrm>
           <a:prstGeom prst="roundRect">
@@ -13957,7 +14715,7 @@
         </p:nvSpPr>
         <p:spPr>
           <a:xfrm>
-            <a:off x="859536" y="4626864"/>
+            <a:off x="859536" y="3959352"/>
             <a:ext cx="10479024" cy="1051560"/>
           </a:xfrm>
           <a:prstGeom prst="rect">

--- a/10-Knowledge-Products/KP1-GEA/videos/module_5/en/decks/KP1_M5_5.3_Deck_v0.1.pptx
+++ b/10-Knowledge-Products/KP1-GEA/videos/module_5/en/decks/KP1_M5_5.3_Deck_v0.1.pptx
@@ -933,7 +933,7 @@
           <a:lstStyle/>
           <a:p>
             <a:r>
-              <a:t>VO: So the second play is your re-use argument, made concrete. It shows, programme by programme, that building your own is locally cheaper and nationally ruinous, and it totals the saving the country gets from re-use. Use it to win the funding argument that an architect, armed only with a principle, usually loses.</a:t>
+              <a:t>VO: So when you are asked whether this works beyond education, the answer is yes, and it gets cheaper as you go. The same method, a different record at the centre, the same shared platforms reused sector after sector. You are not making a one-sector decision. You are making the first move in building a national capability — which is exactly how to frame it when you make the case.</a:t>
             </a:r>
           </a:p>
         </p:txBody>
@@ -1003,13 +1003,13 @@
           <a:lstStyle/>
           <a:p>
             <a:r>
-              <a:t>VO, slide 1: The second play helps you win the hardest argument in EA: that re-use saves money, even though no single project will choose it. The trouble is that the saving is invisible at the project level and only appears across the whole government. This play makes it visible — a business case with a number the budget authority can act on.</a:t>
+              <a:t>VO, slide 1: You may be watching this with education in mind, or you may be a director-general responsible for several sectors. Either way, a fair question is whether this approach is tied to one sector or works across your government. The answer matters for how big a commitment you are really making — and the answer is that the method is sector-agnostic, and it compounds.</a:t>
             </a:r>
           </a:p>
           <a:p/>
           <a:p>
             <a:r>
-              <a:t>On screen: the play's copy-paste prompt is not shown on a slide — it ships in the video description so the viewer can run it on the other half of the screen.</a:t>
+              <a:t>On screen: the copy-paste prompt is not shown on a slide — it ships in the video description so the viewer can draft the artefact on the other half of the screen.</a:t>
             </a:r>
           </a:p>
         </p:txBody>
@@ -1079,13 +1079,7 @@
           <a:lstStyle/>
           <a:p>
             <a:r>
-              <a:t>VO: Here is the argument the play helps you make. Inside any one project, building its own small identity function is cheaper and faster than reusing the national one. So every project builds its own. Across ten projects, the country has paid ten times for identity, and the citizen proves who they are on paper at every counter. The saving from re-use is real, but it only exists when you add up the whole government — which is exactly the view no project has, and the budget authority rarely sees.</a:t>
-            </a:r>
-          </a:p>
-          <a:p/>
-          <a:p>
-            <a:r>
-              <a:t>On screen: bar length is the argument — no figures. The top pair shows why the project chooses to build; the bottom pair shows what that choice costs the country. Reveal the bottom pair on 'Across ten projects'.</a:t>
+              <a:t>VO: Start with what stays the same, because it is most of it. The five phases — discover, assess, adapt, plan, execute and govern. The four sign-offs. The six deliverables. The reuse-before-build default. The binding governance board. None of that is specific to education. It is the method. What changes when you move to another sector is only the contents: the institutions you map, and the kind of record at the centre of the fragmentation.</a:t>
             </a:r>
           </a:p>
         </p:txBody>
@@ -1155,7 +1149,13 @@
           <a:lstStyle/>
           <a:p>
             <a:r>
-              <a:t>VO: The play makes that addition for you. You paste in three to five of your country's programmes, with rough budgets, and the shared building blocks that exist. The AI produces a per-programme table: for each, the local cost of building its own versus consuming the shared block — and it honestly shows that consuming is often more expensive for the individual project. Then it totals across all programmes over five years, where the country-level saving finally appears as a single number.</a:t>
+              <a:t>VO: And that change is smaller than it looks. In education, the duplicated record at the heart of the fragmentation is the learner. In health it is the patient. In agriculture it is the farmer. In social protection it is the beneficiary. Different domain, identical shape — registered several times, re-entered on paper, blocking a flagship the minister has promised. The problem rhymes across sectors because the underlying cause is the same: no shared plan. So the same method resolves it.</a:t>
+            </a:r>
+          </a:p>
+          <a:p/>
+          <a:p>
+            <a:r>
+              <a:t>On screen: health, agriculture and social protection are named as sectors the method transfers to — this is the ToR §4.4 portability statement, not a set of worked examples. Each sector still needs its own discovery and assessment run on the ground.</a:t>
             </a:r>
           </a:p>
         </p:txBody>
@@ -1225,7 +1225,7 @@
           <a:lstStyle/>
           <a:p>
             <a:r>
-              <a:t>VO: One discipline with this play. The numbers it produces are directional, not quotations. Their job is to make the shape of the saving visible — to win the argument that re-use is worth a proper costing — not to be the costing themselves. Present the country-level total as a reason to commission a detailed business case, and name the conditions that make the saving real: the shared blocks must exist, the Board must have authority, the funding must be sustained. Oversell the numbers and a sharp finance officer will dismiss the whole case.</a:t>
+              <a:t>VO: For the case you make upward, this changes the framing. You are not asking the minister to fund a tool for one sector. You are asking to build a national capability, of which the first sector is the foundation and the proof. That is a stronger case and an honest one: the first sector carries more of the cost because it builds the shared muscle; every sector after it benefits from that muscle and costs less. A minister who funds it as a one-sector project undersells it. A minister who funds it as the first wave of a national capability has understood it.</a:t>
             </a:r>
           </a:p>
         </p:txBody>
@@ -1295,13 +1295,13 @@
           <a:lstStyle/>
           <a:p>
             <a:r>
-              <a:t>VO: This is the central case for an EA, turned into a number. A procurement rule can require open standards, but it cannot make re-use the cheapest choice for the project doing the work. Only planning at the level of the whole government can show why re-use is worth it — and that is the view an Enterprise Architecture exists to give. This play takes that view, which usually lives in an architect's head, and puts it on one page the budget authority can read. The whole-of-government saving stops being a claim and becomes a calculation.</a:t>
+              <a:t>VO: Here is the part that changes the size of your decision. The hard, expensive part of this work is building the muscle the first time — the permanent team, the localised framework, the governance, and above all the shared platforms like identity and data exchange. Once those exist, the second sector does not rebuild them. It consumes them. The health sector reuses the identity platform the education work stood up. The agriculture sector reuses the data-exchange backbone. So the second sector is cheaper and faster than the first, and the third cheaper still. The investment you make for one sector is, in large part, an investment for all of them.</a:t>
             </a:r>
           </a:p>
           <a:p/>
           <a:p>
             <a:r>
-              <a:t>Production cue: the pivotal slide of this video. Hold it a beat longer.</a:t>
+              <a:t>Production cue: the pivotal slide of this video. Hold it a beat longer. On screen: bar length is the argument and carries no figures — the dark segments are the muscle built once; every later sector's bar is only its own architecture plus a sliver for consuming what exists.</a:t>
             </a:r>
           </a:p>
         </p:txBody>
@@ -11716,7 +11716,7 @@
                 </a:solidFill>
                 <a:latin typeface="Arial"/>
               </a:rPr>
-              <a:t>5.3 — Play 2 — Build the whole-of-government re-use business case</a:t>
+              <a:t>5.3 — Will it work for your other sectors? — the portability case</a:t>
             </a:r>
           </a:p>
         </p:txBody>
@@ -11832,7 +11832,7 @@
                 </a:solidFill>
                 <a:latin typeface="Arial"/>
               </a:rPr>
-              <a:t>The second play builds the business case that makes re-use visible — a cost comparison showing that each project building its own is cheaper for the project but ruinous for the country — the number that wins the budget argument.</a:t>
+              <a:t>The method is not tied to one sector — the same five phases run on any public-sector domain, and because the hard part is building the muscle once, each sector after the first is cheaper and faster.</a:t>
             </a:r>
           </a:p>
         </p:txBody>
@@ -11929,7 +11929,7 @@
                 </a:solidFill>
                 <a:latin typeface="Arial"/>
               </a:rPr>
-              <a:t>Chief architect · senior architect · sector ICT lead</a:t>
+              <a:t>Director-general · head of a sectoral ICT unit · technical secretary</a:t>
             </a:r>
           </a:p>
         </p:txBody>
@@ -12007,7 +12007,7 @@
                 </a:solidFill>
                 <a:latin typeface="Arial"/>
               </a:rPr>
-              <a:t>THE FIVE PLAYS THIS MODULE TEACHES</a:t>
+              <a:t>THE CASE YOU CARRY INTO THE ROOM</a:t>
             </a:r>
           </a:p>
         </p:txBody>
@@ -12062,7 +12062,7 @@
                 </a:solidFill>
                 <a:latin typeface="Arial"/>
               </a:rPr>
-              <a:t>Play 1 — Discovery and Assess</a:t>
+              <a:t>Proven — four real governments</a:t>
             </a:r>
           </a:p>
         </p:txBody>
@@ -12117,7 +12117,7 @@
                 </a:solidFill>
                 <a:latin typeface="Arial"/>
               </a:rPr>
-              <a:t>Play 2 — the re-use business case</a:t>
+              <a:t>Portable — sector after sector</a:t>
             </a:r>
           </a:p>
         </p:txBody>
@@ -12172,7 +12172,7 @@
                 </a:solidFill>
                 <a:latin typeface="Arial"/>
               </a:rPr>
-              <a:t>Play 3 — minister and architects</a:t>
+              <a:t>The commitment — the one page</a:t>
             </a:r>
           </a:p>
         </p:txBody>
@@ -12227,7 +12227,7 @@
                 </a:solidFill>
                 <a:latin typeface="Arial"/>
               </a:rPr>
-              <a:t>Play 4 — the governance artefacts</a:t>
+              <a:t>The capability — your own people</a:t>
             </a:r>
           </a:p>
         </p:txBody>
@@ -12282,7 +12282,7 @@
                 </a:solidFill>
                 <a:latin typeface="Arial"/>
               </a:rPr>
-              <a:t>Play 5 — comparators and transfer</a:t>
+              <a:t>Necessary now, not just useful</a:t>
             </a:r>
           </a:p>
         </p:txBody>
@@ -12316,7 +12316,7 @@
                 </a:solidFill>
                 <a:latin typeface="Arial"/>
               </a:rPr>
-              <a:t>4-part prompt · 5 plays · 4 safeguards · you decide, the AI drafts</a:t>
+              <a:t>4 governments · 4 killers to design out · 1 page for the minister</a:t>
             </a:r>
           </a:p>
         </p:txBody>
@@ -12441,7 +12441,7 @@
                 </a:solidFill>
                 <a:latin typeface="Arial"/>
               </a:rPr>
-              <a:t>Play 2 — Build the whole-of-government re-use business case</a:t>
+              <a:t>Will it work for your other sectors? — the portability case</a:t>
             </a:r>
           </a:p>
         </p:txBody>
@@ -12475,7 +12475,7 @@
                 </a:solidFill>
                 <a:latin typeface="Arial"/>
               </a:rPr>
-              <a:t>The second play builds the business case that makes re-use visible — a cost comparison showing that each project building its own is cheaper for the project but ruinous for the country — the number that wins the budget argument.</a:t>
+              <a:t>The method is not tied to one sector — the same five phases run on any public-sector domain, and because the hard part is building the muscle once, each sector after the first is cheaper and faster.</a:t>
             </a:r>
           </a:p>
         </p:txBody>
@@ -12605,7 +12605,7 @@
                 </a:solidFill>
                 <a:latin typeface="Arial"/>
               </a:rPr>
-              <a:t>Cheaper for the project. Ruinous for the country</a:t>
+              <a:t>Most of the method does not change at all</a:t>
             </a:r>
           </a:p>
         </p:txBody>
@@ -12618,8 +12618,8 @@
         </p:nvSpPr>
         <p:spPr>
           <a:xfrm>
-            <a:off x="658368" y="1554480"/>
-            <a:ext cx="10881360" cy="329184"/>
+            <a:off x="658368" y="1600200"/>
+            <a:ext cx="10881360" cy="2651760"/>
           </a:xfrm>
           <a:prstGeom prst="rect">
             <a:avLst/>
@@ -12632,73 +12632,60 @@
           </a:bodyPr>
           <a:lstStyle/>
           <a:p>
-            <a:r>
-              <a:rPr sz="1200" b="1" i="0">
-                <a:solidFill>
-                  <a:srgbClr val="595959"/>
-                </a:solidFill>
-                <a:latin typeface="Arial"/>
-              </a:rPr>
-              <a:t>INSIDE ONE PROJECT — the project manager is making the right call, for the project</a:t>
-            </a:r>
-          </a:p>
-        </p:txBody>
-      </p:sp>
-      <p:sp>
-        <p:nvSpPr>
-          <p:cNvPr id="5" name="TextBox 4"/>
-          <p:cNvSpPr txBox="1"/>
-          <p:nvPr/>
-        </p:nvSpPr>
-        <p:spPr>
-          <a:xfrm>
-            <a:off x="658368" y="1938528"/>
-            <a:ext cx="2377440" cy="548640"/>
-          </a:xfrm>
-          <a:prstGeom prst="rect">
-            <a:avLst/>
-          </a:prstGeom>
-          <a:noFill/>
-        </p:spPr>
-        <p:txBody>
-          <a:bodyPr wrap="square" anchor="ctr">
-            <a:spAutoFit/>
-          </a:bodyPr>
-          <a:lstStyle/>
-          <a:p>
-            <a:r>
-              <a:rPr sz="1400" b="1" i="0">
+            <a:pPr>
+              <a:spcAft>
+                <a:spcPts val="1200"/>
+              </a:spcAft>
+            </a:pPr>
+            <a:r>
+              <a:rPr sz="2000" b="0" i="0">
                 <a:solidFill>
                   <a:srgbClr val="1A1A1A"/>
                 </a:solidFill>
                 <a:latin typeface="Arial"/>
               </a:rPr>
-              <a:t>Build its own</a:t>
-            </a:r>
-          </a:p>
-        </p:txBody>
-      </p:sp>
-      <p:sp>
-        <p:nvSpPr>
-          <p:cNvPr id="6" name="Rectangle 5"/>
+              <a:t>The five phases, the four sign-offs, the six deliverables, the reuse-before-build default, the binding governance board — none of it is specific to education. It is the method.</a:t>
+            </a:r>
+          </a:p>
+          <a:p>
+            <a:pPr>
+              <a:spcAft>
+                <a:spcPts val="1200"/>
+              </a:spcAft>
+            </a:pPr>
+            <a:r>
+              <a:rPr sz="2000" b="0" i="0">
+                <a:solidFill>
+                  <a:srgbClr val="1A1A1A"/>
+                </a:solidFill>
+                <a:latin typeface="Arial"/>
+              </a:rPr>
+              <a:t>What changes when you move to another sector is only the contents: the institutions you map, and the kind of record at the centre of the fragmentation.</a:t>
+            </a:r>
+          </a:p>
+        </p:txBody>
+      </p:sp>
+      <p:sp>
+        <p:nvSpPr>
+          <p:cNvPr id="5" name="Rounded Rectangle 4"/>
           <p:cNvSpPr/>
           <p:nvPr/>
         </p:nvSpPr>
         <p:spPr>
           <a:xfrm>
-            <a:off x="3172968" y="1993392"/>
-            <a:ext cx="1813255" cy="438912"/>
-          </a:xfrm>
-          <a:prstGeom prst="rect">
-            <a:avLst/>
+            <a:off x="658368" y="4434840"/>
+            <a:ext cx="10881360" cy="1325880"/>
+          </a:xfrm>
+          <a:prstGeom prst="roundRect">
+            <a:avLst>
+              <a:gd name="adj" fmla="val 4500"/>
+            </a:avLst>
           </a:prstGeom>
           <a:solidFill>
-            <a:srgbClr val="009CD6"/>
+            <a:srgbClr val="E5F5FB"/>
           </a:solidFill>
-          <a:ln w="9525">
-            <a:solidFill>
-              <a:srgbClr val="FFFFFF"/>
-            </a:solidFill>
+          <a:ln>
+            <a:noFill/>
           </a:ln>
           <a:effectLst/>
         </p:spPr>
@@ -12717,32 +12704,23 @@
           </a:fontRef>
         </p:style>
         <p:txBody>
-          <a:bodyPr rtlCol="0" anchor="ctr" lIns="54864" rIns="54864" tIns="0" bIns="0" wrap="square"/>
+          <a:bodyPr rtlCol="0" anchor="ctr"/>
           <a:lstStyle/>
           <a:p>
             <a:pPr algn="ctr"/>
-            <a:r>
-              <a:rPr sz="1100" b="1" i="0">
-                <a:solidFill>
-                  <a:srgbClr val="FFFFFF"/>
-                </a:solidFill>
-                <a:latin typeface="Arial"/>
-              </a:rPr>
-              <a:t>cheaper, faster</a:t>
-            </a:r>
-          </a:p>
-        </p:txBody>
-      </p:sp>
-      <p:sp>
-        <p:nvSpPr>
-          <p:cNvPr id="7" name="TextBox 6"/>
+          </a:p>
+        </p:txBody>
+      </p:sp>
+      <p:sp>
+        <p:nvSpPr>
+          <p:cNvPr id="6" name="TextBox 5"/>
           <p:cNvSpPr txBox="1"/>
           <p:nvPr/>
         </p:nvSpPr>
         <p:spPr>
           <a:xfrm>
-            <a:off x="5105095" y="1938528"/>
-            <a:ext cx="6434632" cy="548640"/>
+            <a:off x="859536" y="4626864"/>
+            <a:ext cx="10479024" cy="1051560"/>
           </a:xfrm>
           <a:prstGeom prst="rect">
             <a:avLst/>
@@ -12750,889 +12728,31 @@
           <a:noFill/>
         </p:spPr>
         <p:txBody>
-          <a:bodyPr wrap="square" anchor="ctr">
-            <a:spAutoFit/>
-          </a:bodyPr>
-          <a:lstStyle/>
-          <a:p>
-            <a:r>
-              <a:rPr sz="1200" b="0" i="1">
-                <a:solidFill>
-                  <a:srgbClr val="595959"/>
-                </a:solidFill>
-                <a:latin typeface="Arial"/>
-              </a:rPr>
-              <a:t>so every project builds its own</a:t>
-            </a:r>
-          </a:p>
-        </p:txBody>
-      </p:sp>
-      <p:sp>
-        <p:nvSpPr>
-          <p:cNvPr id="8" name="TextBox 7"/>
-          <p:cNvSpPr txBox="1"/>
-          <p:nvPr/>
-        </p:nvSpPr>
-        <p:spPr>
-          <a:xfrm>
-            <a:off x="658368" y="2761488"/>
-            <a:ext cx="2377440" cy="548640"/>
-          </a:xfrm>
-          <a:prstGeom prst="rect">
-            <a:avLst/>
-          </a:prstGeom>
-          <a:noFill/>
-        </p:spPr>
-        <p:txBody>
-          <a:bodyPr wrap="square" anchor="ctr">
-            <a:spAutoFit/>
-          </a:bodyPr>
-          <a:lstStyle/>
-          <a:p>
-            <a:r>
-              <a:rPr sz="1400" b="1" i="0">
-                <a:solidFill>
-                  <a:srgbClr val="1A1A1A"/>
-                </a:solidFill>
-                <a:latin typeface="Arial"/>
-              </a:rPr>
-              <a:t>Reuse the national one</a:t>
-            </a:r>
-          </a:p>
-        </p:txBody>
-      </p:sp>
-      <p:sp>
-        <p:nvSpPr>
-          <p:cNvPr id="9" name="Rectangle 8"/>
-          <p:cNvSpPr/>
-          <p:nvPr/>
-        </p:nvSpPr>
-        <p:spPr>
-          <a:xfrm>
-            <a:off x="3172968" y="2816352"/>
-            <a:ext cx="2817266" cy="438912"/>
-          </a:xfrm>
-          <a:prstGeom prst="rect">
-            <a:avLst/>
-          </a:prstGeom>
-          <a:solidFill>
-            <a:srgbClr val="F2F2F2"/>
-          </a:solidFill>
-          <a:ln w="9525">
-            <a:solidFill>
-              <a:srgbClr val="FFFFFF"/>
-            </a:solidFill>
-          </a:ln>
-          <a:effectLst/>
-        </p:spPr>
-        <p:style>
-          <a:lnRef idx="1">
-            <a:schemeClr val="accent1"/>
-          </a:lnRef>
-          <a:fillRef idx="3">
-            <a:schemeClr val="accent1"/>
-          </a:fillRef>
-          <a:effectRef idx="2">
-            <a:schemeClr val="accent1"/>
-          </a:effectRef>
-          <a:fontRef idx="minor">
-            <a:schemeClr val="lt1"/>
-          </a:fontRef>
-        </p:style>
-        <p:txBody>
-          <a:bodyPr rtlCol="0" anchor="ctr" lIns="54864" rIns="54864" tIns="0" bIns="0" wrap="square"/>
-          <a:lstStyle/>
-          <a:p>
-            <a:pPr algn="ctr"/>
-            <a:r>
-              <a:rPr sz="1100" b="1" i="0">
-                <a:solidFill>
-                  <a:srgbClr val="1A1A1A"/>
-                </a:solidFill>
-                <a:latin typeface="Arial"/>
-              </a:rPr>
-              <a:t>learn it · negotiate · wait</a:t>
-            </a:r>
-          </a:p>
-        </p:txBody>
-      </p:sp>
-      <p:sp>
-        <p:nvSpPr>
-          <p:cNvPr id="10" name="TextBox 9"/>
-          <p:cNvSpPr txBox="1"/>
-          <p:nvPr/>
-        </p:nvSpPr>
-        <p:spPr>
-          <a:xfrm>
-            <a:off x="658368" y="3584448"/>
-            <a:ext cx="10881360" cy="329184"/>
-          </a:xfrm>
-          <a:prstGeom prst="rect">
-            <a:avLst/>
-          </a:prstGeom>
-          <a:noFill/>
-        </p:spPr>
-        <p:txBody>
           <a:bodyPr wrap="square">
             <a:spAutoFit/>
           </a:bodyPr>
           <a:lstStyle/>
           <a:p>
-            <a:r>
-              <a:rPr sz="1200" b="1" i="0">
-                <a:solidFill>
-                  <a:srgbClr val="595959"/>
-                </a:solidFill>
-                <a:latin typeface="Arial"/>
-              </a:rPr>
-              <a:t>ACROSS TEN PROJECTS — the column no single project ever sees</a:t>
-            </a:r>
-          </a:p>
-        </p:txBody>
-      </p:sp>
-      <p:sp>
-        <p:nvSpPr>
-          <p:cNvPr id="11" name="TextBox 10"/>
-          <p:cNvSpPr txBox="1"/>
-          <p:nvPr/>
-        </p:nvSpPr>
-        <p:spPr>
-          <a:xfrm>
-            <a:off x="658368" y="3968496"/>
-            <a:ext cx="2377440" cy="548640"/>
-          </a:xfrm>
-          <a:prstGeom prst="rect">
-            <a:avLst/>
-          </a:prstGeom>
-          <a:noFill/>
-        </p:spPr>
-        <p:txBody>
-          <a:bodyPr wrap="square" anchor="ctr">
-            <a:spAutoFit/>
-          </a:bodyPr>
-          <a:lstStyle/>
-          <a:p>
-            <a:r>
-              <a:rPr sz="1400" b="1" i="0">
-                <a:solidFill>
-                  <a:srgbClr val="1A1A1A"/>
-                </a:solidFill>
-                <a:latin typeface="Arial"/>
-              </a:rPr>
-              <a:t>Each builds its own</a:t>
-            </a:r>
-          </a:p>
-        </p:txBody>
-      </p:sp>
-      <p:sp>
-        <p:nvSpPr>
-          <p:cNvPr id="12" name="Rectangle 11"/>
-          <p:cNvSpPr/>
-          <p:nvPr/>
-        </p:nvSpPr>
-        <p:spPr>
-          <a:xfrm>
-            <a:off x="3172968" y="4023359"/>
-            <a:ext cx="683742" cy="438912"/>
-          </a:xfrm>
-          <a:prstGeom prst="rect">
-            <a:avLst/>
-          </a:prstGeom>
-          <a:solidFill>
-            <a:srgbClr val="009CD6"/>
-          </a:solidFill>
-          <a:ln w="9525">
-            <a:solidFill>
-              <a:srgbClr val="FFFFFF"/>
-            </a:solidFill>
-          </a:ln>
-          <a:effectLst/>
-        </p:spPr>
-        <p:style>
-          <a:lnRef idx="1">
-            <a:schemeClr val="accent1"/>
-          </a:lnRef>
-          <a:fillRef idx="3">
-            <a:schemeClr val="accent1"/>
-          </a:fillRef>
-          <a:effectRef idx="2">
-            <a:schemeClr val="accent1"/>
-          </a:effectRef>
-          <a:fontRef idx="minor">
-            <a:schemeClr val="lt1"/>
-          </a:fontRef>
-        </p:style>
-        <p:txBody>
-          <a:bodyPr rtlCol="0" anchor="ctr"/>
-          <a:lstStyle/>
-          <a:p>
-            <a:pPr algn="ctr"/>
-          </a:p>
-        </p:txBody>
-      </p:sp>
-      <p:sp>
-        <p:nvSpPr>
-          <p:cNvPr id="13" name="Rectangle 12"/>
-          <p:cNvSpPr/>
-          <p:nvPr/>
-        </p:nvSpPr>
-        <p:spPr>
-          <a:xfrm>
-            <a:off x="3884142" y="4023359"/>
-            <a:ext cx="683742" cy="438912"/>
-          </a:xfrm>
-          <a:prstGeom prst="rect">
-            <a:avLst/>
-          </a:prstGeom>
-          <a:solidFill>
-            <a:srgbClr val="009CD6"/>
-          </a:solidFill>
-          <a:ln w="9525">
-            <a:solidFill>
-              <a:srgbClr val="FFFFFF"/>
-            </a:solidFill>
-          </a:ln>
-          <a:effectLst/>
-        </p:spPr>
-        <p:style>
-          <a:lnRef idx="1">
-            <a:schemeClr val="accent1"/>
-          </a:lnRef>
-          <a:fillRef idx="3">
-            <a:schemeClr val="accent1"/>
-          </a:fillRef>
-          <a:effectRef idx="2">
-            <a:schemeClr val="accent1"/>
-          </a:effectRef>
-          <a:fontRef idx="minor">
-            <a:schemeClr val="lt1"/>
-          </a:fontRef>
-        </p:style>
-        <p:txBody>
-          <a:bodyPr rtlCol="0" anchor="ctr"/>
-          <a:lstStyle/>
-          <a:p>
-            <a:pPr algn="ctr"/>
-          </a:p>
-        </p:txBody>
-      </p:sp>
-      <p:sp>
-        <p:nvSpPr>
-          <p:cNvPr id="14" name="Rectangle 13"/>
-          <p:cNvSpPr/>
-          <p:nvPr/>
-        </p:nvSpPr>
-        <p:spPr>
-          <a:xfrm>
-            <a:off x="4595317" y="4023359"/>
-            <a:ext cx="683742" cy="438912"/>
-          </a:xfrm>
-          <a:prstGeom prst="rect">
-            <a:avLst/>
-          </a:prstGeom>
-          <a:solidFill>
-            <a:srgbClr val="009CD6"/>
-          </a:solidFill>
-          <a:ln w="9525">
-            <a:solidFill>
-              <a:srgbClr val="FFFFFF"/>
-            </a:solidFill>
-          </a:ln>
-          <a:effectLst/>
-        </p:spPr>
-        <p:style>
-          <a:lnRef idx="1">
-            <a:schemeClr val="accent1"/>
-          </a:lnRef>
-          <a:fillRef idx="3">
-            <a:schemeClr val="accent1"/>
-          </a:fillRef>
-          <a:effectRef idx="2">
-            <a:schemeClr val="accent1"/>
-          </a:effectRef>
-          <a:fontRef idx="minor">
-            <a:schemeClr val="lt1"/>
-          </a:fontRef>
-        </p:style>
-        <p:txBody>
-          <a:bodyPr rtlCol="0" anchor="ctr"/>
-          <a:lstStyle/>
-          <a:p>
-            <a:pPr algn="ctr"/>
-          </a:p>
-        </p:txBody>
-      </p:sp>
-      <p:sp>
-        <p:nvSpPr>
-          <p:cNvPr id="15" name="Rectangle 14"/>
-          <p:cNvSpPr/>
-          <p:nvPr/>
-        </p:nvSpPr>
-        <p:spPr>
-          <a:xfrm>
-            <a:off x="5306491" y="4023359"/>
-            <a:ext cx="683742" cy="438912"/>
-          </a:xfrm>
-          <a:prstGeom prst="rect">
-            <a:avLst/>
-          </a:prstGeom>
-          <a:solidFill>
-            <a:srgbClr val="009CD6"/>
-          </a:solidFill>
-          <a:ln w="9525">
-            <a:solidFill>
-              <a:srgbClr val="FFFFFF"/>
-            </a:solidFill>
-          </a:ln>
-          <a:effectLst/>
-        </p:spPr>
-        <p:style>
-          <a:lnRef idx="1">
-            <a:schemeClr val="accent1"/>
-          </a:lnRef>
-          <a:fillRef idx="3">
-            <a:schemeClr val="accent1"/>
-          </a:fillRef>
-          <a:effectRef idx="2">
-            <a:schemeClr val="accent1"/>
-          </a:effectRef>
-          <a:fontRef idx="minor">
-            <a:schemeClr val="lt1"/>
-          </a:fontRef>
-        </p:style>
-        <p:txBody>
-          <a:bodyPr rtlCol="0" anchor="ctr"/>
-          <a:lstStyle/>
-          <a:p>
-            <a:pPr algn="ctr"/>
-          </a:p>
-        </p:txBody>
-      </p:sp>
-      <p:sp>
-        <p:nvSpPr>
-          <p:cNvPr id="16" name="Rectangle 15"/>
-          <p:cNvSpPr/>
-          <p:nvPr/>
-        </p:nvSpPr>
-        <p:spPr>
-          <a:xfrm>
-            <a:off x="6017666" y="4023359"/>
-            <a:ext cx="683742" cy="438912"/>
-          </a:xfrm>
-          <a:prstGeom prst="rect">
-            <a:avLst/>
-          </a:prstGeom>
-          <a:solidFill>
-            <a:srgbClr val="009CD6"/>
-          </a:solidFill>
-          <a:ln w="9525">
-            <a:solidFill>
-              <a:srgbClr val="FFFFFF"/>
-            </a:solidFill>
-          </a:ln>
-          <a:effectLst/>
-        </p:spPr>
-        <p:style>
-          <a:lnRef idx="1">
-            <a:schemeClr val="accent1"/>
-          </a:lnRef>
-          <a:fillRef idx="3">
-            <a:schemeClr val="accent1"/>
-          </a:fillRef>
-          <a:effectRef idx="2">
-            <a:schemeClr val="accent1"/>
-          </a:effectRef>
-          <a:fontRef idx="minor">
-            <a:schemeClr val="lt1"/>
-          </a:fontRef>
-        </p:style>
-        <p:txBody>
-          <a:bodyPr rtlCol="0" anchor="ctr"/>
-          <a:lstStyle/>
-          <a:p>
-            <a:pPr algn="ctr"/>
-          </a:p>
-        </p:txBody>
-      </p:sp>
-      <p:sp>
-        <p:nvSpPr>
-          <p:cNvPr id="17" name="Rectangle 16"/>
-          <p:cNvSpPr/>
-          <p:nvPr/>
-        </p:nvSpPr>
-        <p:spPr>
-          <a:xfrm>
-            <a:off x="6728841" y="4023359"/>
-            <a:ext cx="683742" cy="438912"/>
-          </a:xfrm>
-          <a:prstGeom prst="rect">
-            <a:avLst/>
-          </a:prstGeom>
-          <a:solidFill>
-            <a:srgbClr val="009CD6"/>
-          </a:solidFill>
-          <a:ln w="9525">
-            <a:solidFill>
-              <a:srgbClr val="FFFFFF"/>
-            </a:solidFill>
-          </a:ln>
-          <a:effectLst/>
-        </p:spPr>
-        <p:style>
-          <a:lnRef idx="1">
-            <a:schemeClr val="accent1"/>
-          </a:lnRef>
-          <a:fillRef idx="3">
-            <a:schemeClr val="accent1"/>
-          </a:fillRef>
-          <a:effectRef idx="2">
-            <a:schemeClr val="accent1"/>
-          </a:effectRef>
-          <a:fontRef idx="minor">
-            <a:schemeClr val="lt1"/>
-          </a:fontRef>
-        </p:style>
-        <p:txBody>
-          <a:bodyPr rtlCol="0" anchor="ctr"/>
-          <a:lstStyle/>
-          <a:p>
-            <a:pPr algn="ctr"/>
-          </a:p>
-        </p:txBody>
-      </p:sp>
-      <p:sp>
-        <p:nvSpPr>
-          <p:cNvPr id="18" name="Rectangle 17"/>
-          <p:cNvSpPr/>
-          <p:nvPr/>
-        </p:nvSpPr>
-        <p:spPr>
-          <a:xfrm>
-            <a:off x="7440015" y="4023359"/>
-            <a:ext cx="683742" cy="438912"/>
-          </a:xfrm>
-          <a:prstGeom prst="rect">
-            <a:avLst/>
-          </a:prstGeom>
-          <a:solidFill>
-            <a:srgbClr val="009CD6"/>
-          </a:solidFill>
-          <a:ln w="9525">
-            <a:solidFill>
-              <a:srgbClr val="FFFFFF"/>
-            </a:solidFill>
-          </a:ln>
-          <a:effectLst/>
-        </p:spPr>
-        <p:style>
-          <a:lnRef idx="1">
-            <a:schemeClr val="accent1"/>
-          </a:lnRef>
-          <a:fillRef idx="3">
-            <a:schemeClr val="accent1"/>
-          </a:fillRef>
-          <a:effectRef idx="2">
-            <a:schemeClr val="accent1"/>
-          </a:effectRef>
-          <a:fontRef idx="minor">
-            <a:schemeClr val="lt1"/>
-          </a:fontRef>
-        </p:style>
-        <p:txBody>
-          <a:bodyPr rtlCol="0" anchor="ctr"/>
-          <a:lstStyle/>
-          <a:p>
-            <a:pPr algn="ctr"/>
-          </a:p>
-        </p:txBody>
-      </p:sp>
-      <p:sp>
-        <p:nvSpPr>
-          <p:cNvPr id="19" name="Rectangle 18"/>
-          <p:cNvSpPr/>
-          <p:nvPr/>
-        </p:nvSpPr>
-        <p:spPr>
-          <a:xfrm>
-            <a:off x="8151190" y="4023359"/>
-            <a:ext cx="683742" cy="438912"/>
-          </a:xfrm>
-          <a:prstGeom prst="rect">
-            <a:avLst/>
-          </a:prstGeom>
-          <a:solidFill>
-            <a:srgbClr val="009CD6"/>
-          </a:solidFill>
-          <a:ln w="9525">
-            <a:solidFill>
-              <a:srgbClr val="FFFFFF"/>
-            </a:solidFill>
-          </a:ln>
-          <a:effectLst/>
-        </p:spPr>
-        <p:style>
-          <a:lnRef idx="1">
-            <a:schemeClr val="accent1"/>
-          </a:lnRef>
-          <a:fillRef idx="3">
-            <a:schemeClr val="accent1"/>
-          </a:fillRef>
-          <a:effectRef idx="2">
-            <a:schemeClr val="accent1"/>
-          </a:effectRef>
-          <a:fontRef idx="minor">
-            <a:schemeClr val="lt1"/>
-          </a:fontRef>
-        </p:style>
-        <p:txBody>
-          <a:bodyPr rtlCol="0" anchor="ctr"/>
-          <a:lstStyle/>
-          <a:p>
-            <a:pPr algn="ctr"/>
-          </a:p>
-        </p:txBody>
-      </p:sp>
-      <p:sp>
-        <p:nvSpPr>
-          <p:cNvPr id="20" name="Rectangle 19"/>
-          <p:cNvSpPr/>
-          <p:nvPr/>
-        </p:nvSpPr>
-        <p:spPr>
-          <a:xfrm>
-            <a:off x="8862364" y="4023359"/>
-            <a:ext cx="683742" cy="438912"/>
-          </a:xfrm>
-          <a:prstGeom prst="rect">
-            <a:avLst/>
-          </a:prstGeom>
-          <a:solidFill>
-            <a:srgbClr val="009CD6"/>
-          </a:solidFill>
-          <a:ln w="9525">
-            <a:solidFill>
-              <a:srgbClr val="FFFFFF"/>
-            </a:solidFill>
-          </a:ln>
-          <a:effectLst/>
-        </p:spPr>
-        <p:style>
-          <a:lnRef idx="1">
-            <a:schemeClr val="accent1"/>
-          </a:lnRef>
-          <a:fillRef idx="3">
-            <a:schemeClr val="accent1"/>
-          </a:fillRef>
-          <a:effectRef idx="2">
-            <a:schemeClr val="accent1"/>
-          </a:effectRef>
-          <a:fontRef idx="minor">
-            <a:schemeClr val="lt1"/>
-          </a:fontRef>
-        </p:style>
-        <p:txBody>
-          <a:bodyPr rtlCol="0" anchor="ctr"/>
-          <a:lstStyle/>
-          <a:p>
-            <a:pPr algn="ctr"/>
-          </a:p>
-        </p:txBody>
-      </p:sp>
-      <p:sp>
-        <p:nvSpPr>
-          <p:cNvPr id="21" name="Rectangle 20"/>
-          <p:cNvSpPr/>
-          <p:nvPr/>
-        </p:nvSpPr>
-        <p:spPr>
-          <a:xfrm>
-            <a:off x="9573539" y="4023359"/>
-            <a:ext cx="683742" cy="438912"/>
-          </a:xfrm>
-          <a:prstGeom prst="rect">
-            <a:avLst/>
-          </a:prstGeom>
-          <a:solidFill>
-            <a:srgbClr val="009CD6"/>
-          </a:solidFill>
-          <a:ln w="9525">
-            <a:solidFill>
-              <a:srgbClr val="FFFFFF"/>
-            </a:solidFill>
-          </a:ln>
-          <a:effectLst/>
-        </p:spPr>
-        <p:style>
-          <a:lnRef idx="1">
-            <a:schemeClr val="accent1"/>
-          </a:lnRef>
-          <a:fillRef idx="3">
-            <a:schemeClr val="accent1"/>
-          </a:fillRef>
-          <a:effectRef idx="2">
-            <a:schemeClr val="accent1"/>
-          </a:effectRef>
-          <a:fontRef idx="minor">
-            <a:schemeClr val="lt1"/>
-          </a:fontRef>
-        </p:style>
-        <p:txBody>
-          <a:bodyPr rtlCol="0" anchor="ctr"/>
-          <a:lstStyle/>
-          <a:p>
-            <a:pPr algn="ctr"/>
-          </a:p>
-        </p:txBody>
-      </p:sp>
-      <p:sp>
-        <p:nvSpPr>
-          <p:cNvPr id="22" name="TextBox 21"/>
-          <p:cNvSpPr txBox="1"/>
-          <p:nvPr/>
-        </p:nvSpPr>
-        <p:spPr>
-          <a:xfrm>
-            <a:off x="10376153" y="3968496"/>
-            <a:ext cx="1163574" cy="548640"/>
-          </a:xfrm>
-          <a:prstGeom prst="rect">
-            <a:avLst/>
-          </a:prstGeom>
-          <a:noFill/>
-        </p:spPr>
-        <p:txBody>
-          <a:bodyPr wrap="square" anchor="ctr">
-            <a:spAutoFit/>
-          </a:bodyPr>
-          <a:lstStyle/>
-          <a:p>
-            <a:r>
-              <a:rPr sz="1200" b="0" i="1">
-                <a:solidFill>
-                  <a:srgbClr val="595959"/>
-                </a:solidFill>
-                <a:latin typeface="Arial"/>
-              </a:rPr>
-              <a:t>paid ten times for identity</a:t>
-            </a:r>
-          </a:p>
-        </p:txBody>
-      </p:sp>
-      <p:sp>
-        <p:nvSpPr>
-          <p:cNvPr id="23" name="TextBox 22"/>
-          <p:cNvSpPr txBox="1"/>
-          <p:nvPr/>
-        </p:nvSpPr>
-        <p:spPr>
-          <a:xfrm>
-            <a:off x="658368" y="4791456"/>
-            <a:ext cx="2377440" cy="548640"/>
-          </a:xfrm>
-          <a:prstGeom prst="rect">
-            <a:avLst/>
-          </a:prstGeom>
-          <a:noFill/>
-        </p:spPr>
-        <p:txBody>
-          <a:bodyPr wrap="square" anchor="ctr">
-            <a:spAutoFit/>
-          </a:bodyPr>
-          <a:lstStyle/>
-          <a:p>
-            <a:r>
-              <a:rPr sz="1400" b="1" i="0">
-                <a:solidFill>
-                  <a:srgbClr val="1A1A1A"/>
-                </a:solidFill>
-                <a:latin typeface="Arial"/>
-              </a:rPr>
-              <a:t>Build once, consume ×9</a:t>
-            </a:r>
-          </a:p>
-        </p:txBody>
-      </p:sp>
-      <p:sp>
-        <p:nvSpPr>
-          <p:cNvPr id="24" name="Rectangle 23"/>
-          <p:cNvSpPr/>
-          <p:nvPr/>
-        </p:nvSpPr>
-        <p:spPr>
-          <a:xfrm>
-            <a:off x="3172968" y="4846320"/>
-            <a:ext cx="1813255" cy="438912"/>
-          </a:xfrm>
-          <a:prstGeom prst="rect">
-            <a:avLst/>
-          </a:prstGeom>
-          <a:solidFill>
-            <a:srgbClr val="009CD6"/>
-          </a:solidFill>
-          <a:ln w="9525">
-            <a:solidFill>
-              <a:srgbClr val="FFFFFF"/>
-            </a:solidFill>
-          </a:ln>
-          <a:effectLst/>
-        </p:spPr>
-        <p:style>
-          <a:lnRef idx="1">
-            <a:schemeClr val="accent1"/>
-          </a:lnRef>
-          <a:fillRef idx="3">
-            <a:schemeClr val="accent1"/>
-          </a:fillRef>
-          <a:effectRef idx="2">
-            <a:schemeClr val="accent1"/>
-          </a:effectRef>
-          <a:fontRef idx="minor">
-            <a:schemeClr val="lt1"/>
-          </a:fontRef>
-        </p:style>
-        <p:txBody>
-          <a:bodyPr rtlCol="0" anchor="ctr" lIns="54864" rIns="54864" tIns="0" bIns="0" wrap="square"/>
-          <a:lstStyle/>
-          <a:p>
-            <a:pPr algn="ctr"/>
-            <a:r>
-              <a:rPr sz="1100" b="1" i="0">
-                <a:solidFill>
-                  <a:srgbClr val="FFFFFF"/>
-                </a:solidFill>
-                <a:latin typeface="Arial"/>
-              </a:rPr>
-              <a:t>build once</a:t>
-            </a:r>
-          </a:p>
-        </p:txBody>
-      </p:sp>
-      <p:sp>
-        <p:nvSpPr>
-          <p:cNvPr id="25" name="Rectangle 24"/>
-          <p:cNvSpPr/>
-          <p:nvPr/>
-        </p:nvSpPr>
-        <p:spPr>
-          <a:xfrm>
-            <a:off x="5013655" y="4846320"/>
-            <a:ext cx="1311249" cy="438912"/>
-          </a:xfrm>
-          <a:prstGeom prst="rect">
-            <a:avLst/>
-          </a:prstGeom>
-          <a:solidFill>
-            <a:srgbClr val="E5F5FB"/>
-          </a:solidFill>
-          <a:ln w="9525">
-            <a:solidFill>
-              <a:srgbClr val="FFFFFF"/>
-            </a:solidFill>
-          </a:ln>
-          <a:effectLst/>
-        </p:spPr>
-        <p:style>
-          <a:lnRef idx="1">
-            <a:schemeClr val="accent1"/>
-          </a:lnRef>
-          <a:fillRef idx="3">
-            <a:schemeClr val="accent1"/>
-          </a:fillRef>
-          <a:effectRef idx="2">
-            <a:schemeClr val="accent1"/>
-          </a:effectRef>
-          <a:fontRef idx="minor">
-            <a:schemeClr val="lt1"/>
-          </a:fontRef>
-        </p:style>
-        <p:txBody>
-          <a:bodyPr rtlCol="0" anchor="ctr" lIns="54864" rIns="54864" tIns="0" bIns="0" wrap="square"/>
-          <a:lstStyle/>
-          <a:p>
-            <a:pPr algn="ctr"/>
-            <a:r>
-              <a:rPr sz="1100" b="1" i="0">
+            <a:pPr>
+              <a:spcAft>
+                <a:spcPts val="700"/>
+              </a:spcAft>
+            </a:pPr>
+            <a:r>
+              <a:rPr sz="2300" b="1" i="0">
                 <a:solidFill>
                   <a:srgbClr val="006E96"/>
                 </a:solidFill>
                 <a:latin typeface="Arial"/>
               </a:rPr>
-              <a:t>nine consume</a:t>
-            </a:r>
-          </a:p>
-        </p:txBody>
-      </p:sp>
-      <p:sp>
-        <p:nvSpPr>
-          <p:cNvPr id="26" name="TextBox 25"/>
-          <p:cNvSpPr txBox="1"/>
-          <p:nvPr/>
-        </p:nvSpPr>
-        <p:spPr>
-          <a:xfrm>
-            <a:off x="6443776" y="4791456"/>
-            <a:ext cx="5095951" cy="548640"/>
-          </a:xfrm>
-          <a:prstGeom prst="rect">
-            <a:avLst/>
-          </a:prstGeom>
-          <a:noFill/>
-        </p:spPr>
-        <p:txBody>
-          <a:bodyPr wrap="square" anchor="ctr">
-            <a:spAutoFit/>
-          </a:bodyPr>
-          <a:lstStyle/>
-          <a:p>
-            <a:r>
-              <a:rPr sz="1200" b="0" i="1">
-                <a:solidFill>
-                  <a:srgbClr val="595959"/>
-                </a:solidFill>
-                <a:latin typeface="Arial"/>
-              </a:rPr>
-              <a:t>the citizen proves who they are once</a:t>
-            </a:r>
-          </a:p>
-        </p:txBody>
-      </p:sp>
-      <p:sp>
-        <p:nvSpPr>
-          <p:cNvPr id="27" name="TextBox 26"/>
-          <p:cNvSpPr txBox="1"/>
-          <p:nvPr/>
-        </p:nvSpPr>
-        <p:spPr>
-          <a:xfrm>
-            <a:off x="658368" y="5760720"/>
-            <a:ext cx="10881360" cy="548640"/>
-          </a:xfrm>
-          <a:prstGeom prst="rect">
-            <a:avLst/>
-          </a:prstGeom>
-          <a:noFill/>
-        </p:spPr>
-        <p:txBody>
-          <a:bodyPr wrap="square">
-            <a:spAutoFit/>
-          </a:bodyPr>
-          <a:lstStyle/>
-          <a:p>
-            <a:r>
-              <a:rPr sz="1550" b="1" i="0">
-                <a:solidFill>
-                  <a:srgbClr val="006E96"/>
-                </a:solidFill>
-                <a:latin typeface="Arial"/>
-              </a:rPr>
-              <a:t>The re-use saving only exists when you add up the whole government — the view no project has.</a:t>
-            </a:r>
-          </a:p>
-        </p:txBody>
-      </p:sp>
-      <p:sp>
-        <p:nvSpPr>
-          <p:cNvPr id="28" name="TextBox 27"/>
+              <a:t>The method travels. Only the contents change.</a:t>
+            </a:r>
+          </a:p>
+        </p:txBody>
+      </p:sp>
+      <p:sp>
+        <p:nvSpPr>
+          <p:cNvPr id="7" name="TextBox 6"/>
           <p:cNvSpPr txBox="1"/>
           <p:nvPr/>
         </p:nvSpPr>
@@ -13659,7 +12779,7 @@
                 </a:solidFill>
                 <a:latin typeface="Arial"/>
               </a:rPr>
-              <a:t>5.3 · Play 2 — Build the whole-of-government re-use business case</a:t>
+              <a:t>5.3 · Will it work for your other sectors? — the portability case</a:t>
             </a:r>
           </a:p>
         </p:txBody>
@@ -13755,27 +12875,82 @@
                 </a:solidFill>
                 <a:latin typeface="Arial"/>
               </a:rPr>
-              <a:t>What the play produces</a:t>
-            </a:r>
-          </a:p>
-        </p:txBody>
-      </p:sp>
-      <p:sp>
-        <p:nvSpPr>
-          <p:cNvPr id="4" name="Oval 3"/>
+              <a:t>What changes is the record at the centre</a:t>
+            </a:r>
+          </a:p>
+        </p:txBody>
+      </p:sp>
+      <p:sp>
+        <p:nvSpPr>
+          <p:cNvPr id="4" name="TextBox 3"/>
+          <p:cNvSpPr txBox="1"/>
+          <p:nvPr/>
+        </p:nvSpPr>
+        <p:spPr>
+          <a:xfrm>
+            <a:off x="658368" y="1463040"/>
+            <a:ext cx="10984687" cy="1028699"/>
+          </a:xfrm>
+          <a:prstGeom prst="rect">
+            <a:avLst/>
+          </a:prstGeom>
+          <a:noFill/>
+        </p:spPr>
+        <p:txBody>
+          <a:bodyPr wrap="square">
+            <a:spAutoFit/>
+          </a:bodyPr>
+          <a:lstStyle/>
+          <a:p>
+            <a:pPr>
+              <a:spcAft>
+                <a:spcPts val="300"/>
+              </a:spcAft>
+            </a:pPr>
+            <a:r>
+              <a:rPr sz="1900" b="1" i="0">
+                <a:solidFill>
+                  <a:srgbClr val="1A1A1A"/>
+                </a:solidFill>
+                <a:latin typeface="Arial"/>
+              </a:rPr>
+              <a:t>Education — the learner</a:t>
+            </a:r>
+          </a:p>
+          <a:p>
+            <a:pPr>
+              <a:spcAft>
+                <a:spcPts val="300"/>
+              </a:spcAft>
+            </a:pPr>
+            <a:r>
+              <a:rPr sz="1550" b="0" i="0">
+                <a:solidFill>
+                  <a:srgbClr val="595959"/>
+                </a:solidFill>
+                <a:latin typeface="Arial"/>
+              </a:rPr>
+              <a:t>Registered in the school census, by the examination authority, by a grant programme.</a:t>
+            </a:r>
+          </a:p>
+        </p:txBody>
+      </p:sp>
+      <p:sp>
+        <p:nvSpPr>
+          <p:cNvPr id="5" name="Rectangle 4"/>
           <p:cNvSpPr/>
           <p:nvPr/>
         </p:nvSpPr>
         <p:spPr>
           <a:xfrm>
-            <a:off x="621792" y="1508760"/>
-            <a:ext cx="310896" cy="310896"/>
-          </a:xfrm>
-          <a:prstGeom prst="ellipse">
+            <a:off x="621792" y="2496312"/>
+            <a:ext cx="10881360" cy="12700"/>
+          </a:xfrm>
+          <a:prstGeom prst="rect">
             <a:avLst/>
           </a:prstGeom>
           <a:solidFill>
-            <a:srgbClr val="009CD6"/>
+            <a:srgbClr val="DDECF4"/>
           </a:solidFill>
           <a:ln>
             <a:noFill/>
@@ -13797,32 +12972,23 @@
           </a:fontRef>
         </p:style>
         <p:txBody>
-          <a:bodyPr rtlCol="0" anchor="ctr" lIns="0" rIns="0" tIns="0" bIns="0" wrap="square"/>
+          <a:bodyPr rtlCol="0" anchor="ctr"/>
           <a:lstStyle/>
           <a:p>
             <a:pPr algn="ctr"/>
-            <a:r>
-              <a:rPr sz="1300" b="1" i="0">
-                <a:solidFill>
-                  <a:srgbClr val="FFFFFF"/>
-                </a:solidFill>
-                <a:latin typeface="Arial"/>
-              </a:rPr>
-              <a:t>1</a:t>
-            </a:r>
-          </a:p>
-        </p:txBody>
-      </p:sp>
-      <p:sp>
-        <p:nvSpPr>
-          <p:cNvPr id="5" name="TextBox 4"/>
+          </a:p>
+        </p:txBody>
+      </p:sp>
+      <p:sp>
+        <p:nvSpPr>
+          <p:cNvPr id="6" name="TextBox 5"/>
           <p:cNvSpPr txBox="1"/>
           <p:nvPr/>
         </p:nvSpPr>
         <p:spPr>
           <a:xfrm>
-            <a:off x="1115568" y="1463040"/>
-            <a:ext cx="10527487" cy="1386839"/>
+            <a:off x="658368" y="2537460"/>
+            <a:ext cx="10984687" cy="1028699"/>
           </a:xfrm>
           <a:prstGeom prst="rect">
             <a:avLst/>
@@ -13847,7 +13013,7 @@
                 </a:solidFill>
                 <a:latin typeface="Arial"/>
               </a:rPr>
-              <a:t>You paste in three to five programmes</a:t>
+              <a:t>Health — the patient</a:t>
             </a:r>
           </a:p>
           <a:p>
@@ -13863,20 +13029,20 @@
                 </a:solidFill>
                 <a:latin typeface="Arial"/>
               </a:rPr>
-              <a:t>Rough budget envelopes, plus the shared building blocks that already exist.</a:t>
-            </a:r>
-          </a:p>
-        </p:txBody>
-      </p:sp>
-      <p:sp>
-        <p:nvSpPr>
-          <p:cNvPr id="6" name="Rectangle 5"/>
+              <a:t>The record that should follow a person between facilities.</a:t>
+            </a:r>
+          </a:p>
+        </p:txBody>
+      </p:sp>
+      <p:sp>
+        <p:nvSpPr>
+          <p:cNvPr id="7" name="Rectangle 6"/>
           <p:cNvSpPr/>
           <p:nvPr/>
         </p:nvSpPr>
         <p:spPr>
           <a:xfrm>
-            <a:off x="621792" y="2854452"/>
+            <a:off x="621792" y="3570732"/>
             <a:ext cx="10881360" cy="12700"/>
           </a:xfrm>
           <a:prstGeom prst="rect">
@@ -13914,20 +13080,75 @@
       </p:sp>
       <p:sp>
         <p:nvSpPr>
-          <p:cNvPr id="7" name="Oval 6"/>
+          <p:cNvPr id="8" name="TextBox 7"/>
+          <p:cNvSpPr txBox="1"/>
+          <p:nvPr/>
+        </p:nvSpPr>
+        <p:spPr>
+          <a:xfrm>
+            <a:off x="658368" y="3611879"/>
+            <a:ext cx="10984687" cy="1028699"/>
+          </a:xfrm>
+          <a:prstGeom prst="rect">
+            <a:avLst/>
+          </a:prstGeom>
+          <a:noFill/>
+        </p:spPr>
+        <p:txBody>
+          <a:bodyPr wrap="square">
+            <a:spAutoFit/>
+          </a:bodyPr>
+          <a:lstStyle/>
+          <a:p>
+            <a:pPr>
+              <a:spcAft>
+                <a:spcPts val="300"/>
+              </a:spcAft>
+            </a:pPr>
+            <a:r>
+              <a:rPr sz="1900" b="1" i="0">
+                <a:solidFill>
+                  <a:srgbClr val="1A1A1A"/>
+                </a:solidFill>
+                <a:latin typeface="Arial"/>
+              </a:rPr>
+              <a:t>Agriculture — the farmer</a:t>
+            </a:r>
+          </a:p>
+          <a:p>
+            <a:pPr>
+              <a:spcAft>
+                <a:spcPts val="300"/>
+              </a:spcAft>
+            </a:pPr>
+            <a:r>
+              <a:rPr sz="1550" b="0" i="0">
+                <a:solidFill>
+                  <a:srgbClr val="595959"/>
+                </a:solidFill>
+                <a:latin typeface="Arial"/>
+              </a:rPr>
+              <a:t>The registry every subsidy and extension programme rebuilds.</a:t>
+            </a:r>
+          </a:p>
+        </p:txBody>
+      </p:sp>
+      <p:sp>
+        <p:nvSpPr>
+          <p:cNvPr id="9" name="Rectangle 8"/>
           <p:cNvSpPr/>
           <p:nvPr/>
         </p:nvSpPr>
         <p:spPr>
           <a:xfrm>
-            <a:off x="621792" y="2941319"/>
-            <a:ext cx="310896" cy="310896"/>
-          </a:xfrm>
-          <a:prstGeom prst="ellipse">
+            <a:off x="621792" y="4645152"/>
+            <a:ext cx="10881360" cy="12700"/>
+          </a:xfrm>
+          <a:prstGeom prst="rect">
             <a:avLst/>
           </a:prstGeom>
           <a:solidFill>
-            <a:srgbClr val="009CD6"/>
+            <a:srgbClr val="DDECF4"/>
           </a:solidFill>
           <a:ln>
             <a:noFill/>
@@ -13949,32 +13170,23 @@
           </a:fontRef>
         </p:style>
         <p:txBody>
-          <a:bodyPr rtlCol="0" anchor="ctr" lIns="0" rIns="0" tIns="0" bIns="0" wrap="square"/>
+          <a:bodyPr rtlCol="0" anchor="ctr"/>
           <a:lstStyle/>
           <a:p>
             <a:pPr algn="ctr"/>
-            <a:r>
-              <a:rPr sz="1300" b="1" i="0">
-                <a:solidFill>
-                  <a:srgbClr val="FFFFFF"/>
-                </a:solidFill>
-                <a:latin typeface="Arial"/>
-              </a:rPr>
-              <a:t>2</a:t>
-            </a:r>
-          </a:p>
-        </p:txBody>
-      </p:sp>
-      <p:sp>
-        <p:nvSpPr>
-          <p:cNvPr id="8" name="TextBox 7"/>
+          </a:p>
+        </p:txBody>
+      </p:sp>
+      <p:sp>
+        <p:nvSpPr>
+          <p:cNvPr id="10" name="TextBox 9"/>
           <p:cNvSpPr txBox="1"/>
           <p:nvPr/>
         </p:nvSpPr>
         <p:spPr>
           <a:xfrm>
-            <a:off x="1115568" y="2895600"/>
-            <a:ext cx="10527487" cy="1386839"/>
+            <a:off x="658368" y="4686300"/>
+            <a:ext cx="10984687" cy="1028699"/>
           </a:xfrm>
           <a:prstGeom prst="rect">
             <a:avLst/>
@@ -13999,7 +13211,7 @@
                 </a:solidFill>
                 <a:latin typeface="Arial"/>
               </a:rPr>
-              <a:t>It returns a per-programme cost table</a:t>
+              <a:t>Social protection — the beneficiary</a:t>
             </a:r>
           </a:p>
           <a:p>
@@ -14015,104 +13227,7 @@
                 </a:solidFill>
                 <a:latin typeface="Arial"/>
               </a:rPr>
-              <a:t>Build your own versus consume the shared block — honestly showing that consuming is often dearer for the single project.</a:t>
-            </a:r>
-          </a:p>
-        </p:txBody>
-      </p:sp>
-      <p:sp>
-        <p:nvSpPr>
-          <p:cNvPr id="9" name="Rectangle 8"/>
-          <p:cNvSpPr/>
-          <p:nvPr/>
-        </p:nvSpPr>
-        <p:spPr>
-          <a:xfrm>
-            <a:off x="621792" y="4287011"/>
-            <a:ext cx="10881360" cy="12700"/>
-          </a:xfrm>
-          <a:prstGeom prst="rect">
-            <a:avLst/>
-          </a:prstGeom>
-          <a:solidFill>
-            <a:srgbClr val="DDECF4"/>
-          </a:solidFill>
-          <a:ln>
-            <a:noFill/>
-          </a:ln>
-          <a:effectLst/>
-        </p:spPr>
-        <p:style>
-          <a:lnRef idx="1">
-            <a:schemeClr val="accent1"/>
-          </a:lnRef>
-          <a:fillRef idx="3">
-            <a:schemeClr val="accent1"/>
-          </a:fillRef>
-          <a:effectRef idx="2">
-            <a:schemeClr val="accent1"/>
-          </a:effectRef>
-          <a:fontRef idx="minor">
-            <a:schemeClr val="lt1"/>
-          </a:fontRef>
-        </p:style>
-        <p:txBody>
-          <a:bodyPr rtlCol="0" anchor="ctr"/>
-          <a:lstStyle/>
-          <a:p>
-            <a:pPr algn="ctr"/>
-          </a:p>
-        </p:txBody>
-      </p:sp>
-      <p:sp>
-        <p:nvSpPr>
-          <p:cNvPr id="10" name="Oval 9"/>
-          <p:cNvSpPr/>
-          <p:nvPr/>
-        </p:nvSpPr>
-        <p:spPr>
-          <a:xfrm>
-            <a:off x="621792" y="4373879"/>
-            <a:ext cx="310896" cy="310896"/>
-          </a:xfrm>
-          <a:prstGeom prst="ellipse">
-            <a:avLst/>
-          </a:prstGeom>
-          <a:solidFill>
-            <a:srgbClr val="009CD6"/>
-          </a:solidFill>
-          <a:ln>
-            <a:noFill/>
-          </a:ln>
-          <a:effectLst/>
-        </p:spPr>
-        <p:style>
-          <a:lnRef idx="1">
-            <a:schemeClr val="accent1"/>
-          </a:lnRef>
-          <a:fillRef idx="3">
-            <a:schemeClr val="accent1"/>
-          </a:fillRef>
-          <a:effectRef idx="2">
-            <a:schemeClr val="accent1"/>
-          </a:effectRef>
-          <a:fontRef idx="minor">
-            <a:schemeClr val="lt1"/>
-          </a:fontRef>
-        </p:style>
-        <p:txBody>
-          <a:bodyPr rtlCol="0" anchor="ctr" lIns="0" rIns="0" tIns="0" bIns="0" wrap="square"/>
-          <a:lstStyle/>
-          <a:p>
-            <a:pPr algn="ctr"/>
-            <a:r>
-              <a:rPr sz="1300" b="1" i="0">
-                <a:solidFill>
-                  <a:srgbClr val="FFFFFF"/>
-                </a:solidFill>
-                <a:latin typeface="Arial"/>
-              </a:rPr>
-              <a:t>3</a:t>
+              <a:t>The list each programme keeps its own copy of.</a:t>
             </a:r>
           </a:p>
         </p:txBody>
@@ -14120,61 +13235,6 @@
       <p:sp>
         <p:nvSpPr>
           <p:cNvPr id="11" name="TextBox 10"/>
-          <p:cNvSpPr txBox="1"/>
-          <p:nvPr/>
-        </p:nvSpPr>
-        <p:spPr>
-          <a:xfrm>
-            <a:off x="1115568" y="4328159"/>
-            <a:ext cx="10527487" cy="1386839"/>
-          </a:xfrm>
-          <a:prstGeom prst="rect">
-            <a:avLst/>
-          </a:prstGeom>
-          <a:noFill/>
-        </p:spPr>
-        <p:txBody>
-          <a:bodyPr wrap="square">
-            <a:spAutoFit/>
-          </a:bodyPr>
-          <a:lstStyle/>
-          <a:p>
-            <a:pPr>
-              <a:spcAft>
-                <a:spcPts val="300"/>
-              </a:spcAft>
-            </a:pPr>
-            <a:r>
-              <a:rPr sz="1900" b="1" i="0">
-                <a:solidFill>
-                  <a:srgbClr val="1A1A1A"/>
-                </a:solidFill>
-                <a:latin typeface="Arial"/>
-              </a:rPr>
-              <a:t>It totals across all programmes over five years</a:t>
-            </a:r>
-          </a:p>
-          <a:p>
-            <a:pPr>
-              <a:spcAft>
-                <a:spcPts val="300"/>
-              </a:spcAft>
-            </a:pPr>
-            <a:r>
-              <a:rPr sz="1550" b="0" i="0">
-                <a:solidFill>
-                  <a:srgbClr val="595959"/>
-                </a:solidFill>
-                <a:latin typeface="Arial"/>
-              </a:rPr>
-              <a:t>Where the country-level saving finally appears as a single number.</a:t>
-            </a:r>
-          </a:p>
-        </p:txBody>
-      </p:sp>
-      <p:sp>
-        <p:nvSpPr>
-          <p:cNvPr id="12" name="TextBox 11"/>
           <p:cNvSpPr txBox="1"/>
           <p:nvPr/>
         </p:nvSpPr>
@@ -14201,14 +13261,14 @@
                 </a:solidFill>
                 <a:latin typeface="Arial"/>
               </a:rPr>
-              <a:t>The whole-of-government saving stops being a claim and becomes a calculation.</a:t>
-            </a:r>
-          </a:p>
-        </p:txBody>
-      </p:sp>
-      <p:sp>
-        <p:nvSpPr>
-          <p:cNvPr id="13" name="TextBox 12"/>
+              <a:t>A portability statement, not worked examples — each sector needs its own discovery.</a:t>
+            </a:r>
+          </a:p>
+        </p:txBody>
+      </p:sp>
+      <p:sp>
+        <p:nvSpPr>
+          <p:cNvPr id="12" name="TextBox 11"/>
           <p:cNvSpPr txBox="1"/>
           <p:nvPr/>
         </p:nvSpPr>
@@ -14235,7 +13295,7 @@
                 </a:solidFill>
                 <a:latin typeface="Arial"/>
               </a:rPr>
-              <a:t>5.3 · Play 2 — Build the whole-of-government re-use business case</a:t>
+              <a:t>5.3 · Will it work for your other sectors? — the portability case</a:t>
             </a:r>
           </a:p>
         </p:txBody>
@@ -14331,7 +13391,7 @@
                 </a:solidFill>
                 <a:latin typeface="Arial"/>
               </a:rPr>
-              <a:t>A procurement rule cannot make re-use the cheapest choice for the project doing the work</a:t>
+              <a:t>The second sector is cheaper because the muscle is built once</a:t>
             </a:r>
           </a:p>
         </p:txBody>
@@ -14344,8 +13404,8 @@
         </p:nvSpPr>
         <p:spPr>
           <a:xfrm>
-            <a:off x="658368" y="1600200"/>
-            <a:ext cx="10881360" cy="2295144"/>
+            <a:off x="658368" y="1508760"/>
+            <a:ext cx="10881360" cy="329184"/>
           </a:xfrm>
           <a:prstGeom prst="rect">
             <a:avLst/>
@@ -14358,60 +13418,73 @@
           </a:bodyPr>
           <a:lstStyle/>
           <a:p>
-            <a:pPr>
-              <a:spcAft>
-                <a:spcPts val="1200"/>
-              </a:spcAft>
-            </a:pPr>
-            <a:r>
-              <a:rPr sz="2000" b="0" i="0">
+            <a:r>
+              <a:rPr sz="1200" b="1" i="0">
+                <a:solidFill>
+                  <a:srgbClr val="595959"/>
+                </a:solidFill>
+                <a:latin typeface="Arial"/>
+              </a:rPr>
+              <a:t>WHAT EACH SECTOR PAYS FOR — directional, not a costing</a:t>
+            </a:r>
+          </a:p>
+        </p:txBody>
+      </p:sp>
+      <p:sp>
+        <p:nvSpPr>
+          <p:cNvPr id="5" name="TextBox 4"/>
+          <p:cNvSpPr txBox="1"/>
+          <p:nvPr/>
+        </p:nvSpPr>
+        <p:spPr>
+          <a:xfrm>
+            <a:off x="658368" y="1892807"/>
+            <a:ext cx="2514600" cy="548640"/>
+          </a:xfrm>
+          <a:prstGeom prst="rect">
+            <a:avLst/>
+          </a:prstGeom>
+          <a:noFill/>
+        </p:spPr>
+        <p:txBody>
+          <a:bodyPr wrap="square" anchor="ctr">
+            <a:spAutoFit/>
+          </a:bodyPr>
+          <a:lstStyle/>
+          <a:p>
+            <a:r>
+              <a:rPr sz="1400" b="1" i="0">
                 <a:solidFill>
                   <a:srgbClr val="1A1A1A"/>
                 </a:solidFill>
                 <a:latin typeface="Arial"/>
               </a:rPr>
-              <a:t>A procurement rule can require open standards, but it cannot change the arithmetic inside a single project. Only planning at the level of the whole government can show why re-use is worth it — and that is the view an Enterprise Architecture exists to give.</a:t>
-            </a:r>
-          </a:p>
-          <a:p>
-            <a:pPr>
-              <a:spcAft>
-                <a:spcPts val="1200"/>
-              </a:spcAft>
-            </a:pPr>
-            <a:r>
-              <a:rPr sz="2000" b="0" i="0">
-                <a:solidFill>
-                  <a:srgbClr val="1A1A1A"/>
-                </a:solidFill>
-                <a:latin typeface="Arial"/>
-              </a:rPr>
-              <a:t>This play takes that view, which usually lives in an architect's head, and puts it on one page the budget authority can read.</a:t>
-            </a:r>
-          </a:p>
-        </p:txBody>
-      </p:sp>
-      <p:sp>
-        <p:nvSpPr>
-          <p:cNvPr id="5" name="Rounded Rectangle 4"/>
+              <a:t>Sector 1 — education</a:t>
+            </a:r>
+          </a:p>
+        </p:txBody>
+      </p:sp>
+      <p:sp>
+        <p:nvSpPr>
+          <p:cNvPr id="6" name="Rectangle 5"/>
           <p:cNvSpPr/>
           <p:nvPr/>
         </p:nvSpPr>
         <p:spPr>
           <a:xfrm>
-            <a:off x="658368" y="4078224"/>
-            <a:ext cx="10881360" cy="1325880"/>
-          </a:xfrm>
-          <a:prstGeom prst="roundRect">
-            <a:avLst>
-              <a:gd name="adj" fmla="val 4500"/>
-            </a:avLst>
+            <a:off x="3310128" y="1947672"/>
+            <a:ext cx="1289304" cy="438912"/>
+          </a:xfrm>
+          <a:prstGeom prst="rect">
+            <a:avLst/>
           </a:prstGeom>
           <a:solidFill>
-            <a:srgbClr val="E5F5FB"/>
+            <a:srgbClr val="006E96"/>
           </a:solidFill>
-          <a:ln>
-            <a:noFill/>
+          <a:ln w="9525">
+            <a:solidFill>
+              <a:srgbClr val="FFFFFF"/>
+            </a:solidFill>
           </a:ln>
           <a:effectLst/>
         </p:spPr>
@@ -14430,23 +13503,252 @@
           </a:fontRef>
         </p:style>
         <p:txBody>
-          <a:bodyPr rtlCol="0" anchor="ctr"/>
+          <a:bodyPr rtlCol="0" anchor="ctr" lIns="54864" rIns="54864" tIns="0" bIns="0" wrap="square"/>
           <a:lstStyle/>
           <a:p>
             <a:pPr algn="ctr"/>
-          </a:p>
-        </p:txBody>
-      </p:sp>
-      <p:sp>
-        <p:nvSpPr>
-          <p:cNvPr id="6" name="TextBox 5"/>
+            <a:r>
+              <a:rPr sz="1100" b="1" i="0">
+                <a:solidFill>
+                  <a:srgbClr val="FFFFFF"/>
+                </a:solidFill>
+                <a:latin typeface="Arial"/>
+              </a:rPr>
+              <a:t>permanent team</a:t>
+            </a:r>
+          </a:p>
+        </p:txBody>
+      </p:sp>
+      <p:sp>
+        <p:nvSpPr>
+          <p:cNvPr id="7" name="Rectangle 6"/>
+          <p:cNvSpPr/>
+          <p:nvPr/>
+        </p:nvSpPr>
+        <p:spPr>
+          <a:xfrm>
+            <a:off x="4626864" y="1947672"/>
+            <a:ext cx="1042415" cy="438912"/>
+          </a:xfrm>
+          <a:prstGeom prst="rect">
+            <a:avLst/>
+          </a:prstGeom>
+          <a:solidFill>
+            <a:srgbClr val="006E96"/>
+          </a:solidFill>
+          <a:ln w="9525">
+            <a:solidFill>
+              <a:srgbClr val="FFFFFF"/>
+            </a:solidFill>
+          </a:ln>
+          <a:effectLst/>
+        </p:spPr>
+        <p:style>
+          <a:lnRef idx="1">
+            <a:schemeClr val="accent1"/>
+          </a:lnRef>
+          <a:fillRef idx="3">
+            <a:schemeClr val="accent1"/>
+          </a:fillRef>
+          <a:effectRef idx="2">
+            <a:schemeClr val="accent1"/>
+          </a:effectRef>
+          <a:fontRef idx="minor">
+            <a:schemeClr val="lt1"/>
+          </a:fontRef>
+        </p:style>
+        <p:txBody>
+          <a:bodyPr rtlCol="0" anchor="ctr" lIns="54864" rIns="54864" tIns="0" bIns="0" wrap="square"/>
+          <a:lstStyle/>
+          <a:p>
+            <a:pPr algn="ctr"/>
+            <a:r>
+              <a:rPr sz="1100" b="1" i="0">
+                <a:solidFill>
+                  <a:srgbClr val="FFFFFF"/>
+                </a:solidFill>
+                <a:latin typeface="Arial"/>
+              </a:rPr>
+              <a:t>framework</a:t>
+            </a:r>
+          </a:p>
+        </p:txBody>
+      </p:sp>
+      <p:sp>
+        <p:nvSpPr>
+          <p:cNvPr id="8" name="Rectangle 7"/>
+          <p:cNvSpPr/>
+          <p:nvPr/>
+        </p:nvSpPr>
+        <p:spPr>
+          <a:xfrm>
+            <a:off x="5696712" y="1947672"/>
+            <a:ext cx="1042415" cy="438912"/>
+          </a:xfrm>
+          <a:prstGeom prst="rect">
+            <a:avLst/>
+          </a:prstGeom>
+          <a:solidFill>
+            <a:srgbClr val="006E96"/>
+          </a:solidFill>
+          <a:ln w="9525">
+            <a:solidFill>
+              <a:srgbClr val="FFFFFF"/>
+            </a:solidFill>
+          </a:ln>
+          <a:effectLst/>
+        </p:spPr>
+        <p:style>
+          <a:lnRef idx="1">
+            <a:schemeClr val="accent1"/>
+          </a:lnRef>
+          <a:fillRef idx="3">
+            <a:schemeClr val="accent1"/>
+          </a:fillRef>
+          <a:effectRef idx="2">
+            <a:schemeClr val="accent1"/>
+          </a:effectRef>
+          <a:fontRef idx="minor">
+            <a:schemeClr val="lt1"/>
+          </a:fontRef>
+        </p:style>
+        <p:txBody>
+          <a:bodyPr rtlCol="0" anchor="ctr" lIns="54864" rIns="54864" tIns="0" bIns="0" wrap="square"/>
+          <a:lstStyle/>
+          <a:p>
+            <a:pPr algn="ctr"/>
+            <a:r>
+              <a:rPr sz="1100" b="1" i="0">
+                <a:solidFill>
+                  <a:srgbClr val="FFFFFF"/>
+                </a:solidFill>
+                <a:latin typeface="Arial"/>
+              </a:rPr>
+              <a:t>governance</a:t>
+            </a:r>
+          </a:p>
+        </p:txBody>
+      </p:sp>
+      <p:sp>
+        <p:nvSpPr>
+          <p:cNvPr id="9" name="Rectangle 8"/>
+          <p:cNvSpPr/>
+          <p:nvPr/>
+        </p:nvSpPr>
+        <p:spPr>
+          <a:xfrm>
+            <a:off x="6766560" y="1947672"/>
+            <a:ext cx="1947672" cy="438912"/>
+          </a:xfrm>
+          <a:prstGeom prst="rect">
+            <a:avLst/>
+          </a:prstGeom>
+          <a:solidFill>
+            <a:srgbClr val="006E96"/>
+          </a:solidFill>
+          <a:ln w="9525">
+            <a:solidFill>
+              <a:srgbClr val="FFFFFF"/>
+            </a:solidFill>
+          </a:ln>
+          <a:effectLst/>
+        </p:spPr>
+        <p:style>
+          <a:lnRef idx="1">
+            <a:schemeClr val="accent1"/>
+          </a:lnRef>
+          <a:fillRef idx="3">
+            <a:schemeClr val="accent1"/>
+          </a:fillRef>
+          <a:effectRef idx="2">
+            <a:schemeClr val="accent1"/>
+          </a:effectRef>
+          <a:fontRef idx="minor">
+            <a:schemeClr val="lt1"/>
+          </a:fontRef>
+        </p:style>
+        <p:txBody>
+          <a:bodyPr rtlCol="0" anchor="ctr" lIns="54864" rIns="54864" tIns="0" bIns="0" wrap="square"/>
+          <a:lstStyle/>
+          <a:p>
+            <a:pPr algn="ctr"/>
+            <a:r>
+              <a:rPr sz="1100" b="1" i="0">
+                <a:solidFill>
+                  <a:srgbClr val="FFFFFF"/>
+                </a:solidFill>
+                <a:latin typeface="Arial"/>
+              </a:rPr>
+              <a:t>identity · data exchange</a:t>
+            </a:r>
+          </a:p>
+        </p:txBody>
+      </p:sp>
+      <p:sp>
+        <p:nvSpPr>
+          <p:cNvPr id="10" name="Rectangle 9"/>
+          <p:cNvSpPr/>
+          <p:nvPr/>
+        </p:nvSpPr>
+        <p:spPr>
+          <a:xfrm>
+            <a:off x="8741664" y="1947672"/>
+            <a:ext cx="1618488" cy="438912"/>
+          </a:xfrm>
+          <a:prstGeom prst="rect">
+            <a:avLst/>
+          </a:prstGeom>
+          <a:solidFill>
+            <a:srgbClr val="009CD6"/>
+          </a:solidFill>
+          <a:ln w="9525">
+            <a:solidFill>
+              <a:srgbClr val="FFFFFF"/>
+            </a:solidFill>
+          </a:ln>
+          <a:effectLst/>
+        </p:spPr>
+        <p:style>
+          <a:lnRef idx="1">
+            <a:schemeClr val="accent1"/>
+          </a:lnRef>
+          <a:fillRef idx="3">
+            <a:schemeClr val="accent1"/>
+          </a:fillRef>
+          <a:effectRef idx="2">
+            <a:schemeClr val="accent1"/>
+          </a:effectRef>
+          <a:fontRef idx="minor">
+            <a:schemeClr val="lt1"/>
+          </a:fontRef>
+        </p:style>
+        <p:txBody>
+          <a:bodyPr rtlCol="0" anchor="ctr" lIns="54864" rIns="54864" tIns="0" bIns="0" wrap="square"/>
+          <a:lstStyle/>
+          <a:p>
+            <a:pPr algn="ctr"/>
+            <a:r>
+              <a:rPr sz="1100" b="1" i="0">
+                <a:solidFill>
+                  <a:srgbClr val="FFFFFF"/>
+                </a:solidFill>
+                <a:latin typeface="Arial"/>
+              </a:rPr>
+              <a:t>its own architecture</a:t>
+            </a:r>
+          </a:p>
+        </p:txBody>
+      </p:sp>
+      <p:sp>
+        <p:nvSpPr>
+          <p:cNvPr id="11" name="TextBox 10"/>
           <p:cNvSpPr txBox="1"/>
           <p:nvPr/>
         </p:nvSpPr>
         <p:spPr>
           <a:xfrm>
-            <a:off x="859536" y="4270248"/>
-            <a:ext cx="10479024" cy="1051560"/>
+            <a:off x="658368" y="2642615"/>
+            <a:ext cx="2514600" cy="548640"/>
           </a:xfrm>
           <a:prstGeom prst="rect">
             <a:avLst/>
@@ -14454,31 +13756,560 @@
           <a:noFill/>
         </p:spPr>
         <p:txBody>
-          <a:bodyPr wrap="square">
+          <a:bodyPr wrap="square" anchor="ctr">
             <a:spAutoFit/>
           </a:bodyPr>
           <a:lstStyle/>
           <a:p>
-            <a:pPr>
-              <a:spcAft>
-                <a:spcPts val="700"/>
-              </a:spcAft>
-            </a:pPr>
-            <a:r>
-              <a:rPr sz="2300" b="1" i="0">
+            <a:r>
+              <a:rPr sz="1400" b="1" i="0">
+                <a:solidFill>
+                  <a:srgbClr val="1A1A1A"/>
+                </a:solidFill>
+                <a:latin typeface="Arial"/>
+              </a:rPr>
+              <a:t>Sector 2 — health</a:t>
+            </a:r>
+          </a:p>
+        </p:txBody>
+      </p:sp>
+      <p:sp>
+        <p:nvSpPr>
+          <p:cNvPr id="12" name="Rectangle 11"/>
+          <p:cNvSpPr/>
+          <p:nvPr/>
+        </p:nvSpPr>
+        <p:spPr>
+          <a:xfrm>
+            <a:off x="3310128" y="2697479"/>
+            <a:ext cx="1618488" cy="438912"/>
+          </a:xfrm>
+          <a:prstGeom prst="rect">
+            <a:avLst/>
+          </a:prstGeom>
+          <a:solidFill>
+            <a:srgbClr val="009CD6"/>
+          </a:solidFill>
+          <a:ln w="9525">
+            <a:solidFill>
+              <a:srgbClr val="FFFFFF"/>
+            </a:solidFill>
+          </a:ln>
+          <a:effectLst/>
+        </p:spPr>
+        <p:style>
+          <a:lnRef idx="1">
+            <a:schemeClr val="accent1"/>
+          </a:lnRef>
+          <a:fillRef idx="3">
+            <a:schemeClr val="accent1"/>
+          </a:fillRef>
+          <a:effectRef idx="2">
+            <a:schemeClr val="accent1"/>
+          </a:effectRef>
+          <a:fontRef idx="minor">
+            <a:schemeClr val="lt1"/>
+          </a:fontRef>
+        </p:style>
+        <p:txBody>
+          <a:bodyPr rtlCol="0" anchor="ctr" lIns="54864" rIns="54864" tIns="0" bIns="0" wrap="square"/>
+          <a:lstStyle/>
+          <a:p>
+            <a:pPr algn="ctr"/>
+            <a:r>
+              <a:rPr sz="1100" b="1" i="0">
+                <a:solidFill>
+                  <a:srgbClr val="FFFFFF"/>
+                </a:solidFill>
+                <a:latin typeface="Arial"/>
+              </a:rPr>
+              <a:t>its own architecture</a:t>
+            </a:r>
+          </a:p>
+        </p:txBody>
+      </p:sp>
+      <p:sp>
+        <p:nvSpPr>
+          <p:cNvPr id="13" name="Rectangle 12"/>
+          <p:cNvSpPr/>
+          <p:nvPr/>
+        </p:nvSpPr>
+        <p:spPr>
+          <a:xfrm>
+            <a:off x="4956048" y="2697479"/>
+            <a:ext cx="877824" cy="438912"/>
+          </a:xfrm>
+          <a:prstGeom prst="rect">
+            <a:avLst/>
+          </a:prstGeom>
+          <a:solidFill>
+            <a:srgbClr val="E5F5FB"/>
+          </a:solidFill>
+          <a:ln w="9525">
+            <a:solidFill>
+              <a:srgbClr val="FFFFFF"/>
+            </a:solidFill>
+          </a:ln>
+          <a:effectLst/>
+        </p:spPr>
+        <p:style>
+          <a:lnRef idx="1">
+            <a:schemeClr val="accent1"/>
+          </a:lnRef>
+          <a:fillRef idx="3">
+            <a:schemeClr val="accent1"/>
+          </a:fillRef>
+          <a:effectRef idx="2">
+            <a:schemeClr val="accent1"/>
+          </a:effectRef>
+          <a:fontRef idx="minor">
+            <a:schemeClr val="lt1"/>
+          </a:fontRef>
+        </p:style>
+        <p:txBody>
+          <a:bodyPr rtlCol="0" anchor="ctr" lIns="54864" rIns="54864" tIns="0" bIns="0" wrap="square"/>
+          <a:lstStyle/>
+          <a:p>
+            <a:pPr algn="ctr"/>
+            <a:r>
+              <a:rPr sz="1100" b="1" i="0">
                 <a:solidFill>
                   <a:srgbClr val="006E96"/>
                 </a:solidFill>
                 <a:latin typeface="Arial"/>
               </a:rPr>
-              <a:t>The central case for an EA, turned into a number.</a:t>
-            </a:r>
-          </a:p>
-        </p:txBody>
-      </p:sp>
-      <p:sp>
-        <p:nvSpPr>
-          <p:cNvPr id="7" name="TextBox 6"/>
+              <a:t>consumes</a:t>
+            </a:r>
+          </a:p>
+        </p:txBody>
+      </p:sp>
+      <p:sp>
+        <p:nvSpPr>
+          <p:cNvPr id="14" name="TextBox 13"/>
+          <p:cNvSpPr txBox="1"/>
+          <p:nvPr/>
+        </p:nvSpPr>
+        <p:spPr>
+          <a:xfrm>
+            <a:off x="5952744" y="2642615"/>
+            <a:ext cx="5586984" cy="548640"/>
+          </a:xfrm>
+          <a:prstGeom prst="rect">
+            <a:avLst/>
+          </a:prstGeom>
+          <a:noFill/>
+        </p:spPr>
+        <p:txBody>
+          <a:bodyPr wrap="square" anchor="ctr">
+            <a:spAutoFit/>
+          </a:bodyPr>
+          <a:lstStyle/>
+          <a:p>
+            <a:r>
+              <a:rPr sz="1200" b="0" i="1">
+                <a:solidFill>
+                  <a:srgbClr val="595959"/>
+                </a:solidFill>
+                <a:latin typeface="Arial"/>
+              </a:rPr>
+              <a:t>reuses the identity platform education stood up</a:t>
+            </a:r>
+          </a:p>
+        </p:txBody>
+      </p:sp>
+      <p:sp>
+        <p:nvSpPr>
+          <p:cNvPr id="15" name="TextBox 14"/>
+          <p:cNvSpPr txBox="1"/>
+          <p:nvPr/>
+        </p:nvSpPr>
+        <p:spPr>
+          <a:xfrm>
+            <a:off x="658368" y="3392423"/>
+            <a:ext cx="2514600" cy="548640"/>
+          </a:xfrm>
+          <a:prstGeom prst="rect">
+            <a:avLst/>
+          </a:prstGeom>
+          <a:noFill/>
+        </p:spPr>
+        <p:txBody>
+          <a:bodyPr wrap="square" anchor="ctr">
+            <a:spAutoFit/>
+          </a:bodyPr>
+          <a:lstStyle/>
+          <a:p>
+            <a:r>
+              <a:rPr sz="1400" b="1" i="0">
+                <a:solidFill>
+                  <a:srgbClr val="1A1A1A"/>
+                </a:solidFill>
+                <a:latin typeface="Arial"/>
+              </a:rPr>
+              <a:t>Sector 3 — agriculture</a:t>
+            </a:r>
+          </a:p>
+        </p:txBody>
+      </p:sp>
+      <p:sp>
+        <p:nvSpPr>
+          <p:cNvPr id="16" name="Rectangle 15"/>
+          <p:cNvSpPr/>
+          <p:nvPr/>
+        </p:nvSpPr>
+        <p:spPr>
+          <a:xfrm>
+            <a:off x="3310128" y="3447287"/>
+            <a:ext cx="1207007" cy="438912"/>
+          </a:xfrm>
+          <a:prstGeom prst="rect">
+            <a:avLst/>
+          </a:prstGeom>
+          <a:solidFill>
+            <a:srgbClr val="009CD6"/>
+          </a:solidFill>
+          <a:ln w="9525">
+            <a:solidFill>
+              <a:srgbClr val="FFFFFF"/>
+            </a:solidFill>
+          </a:ln>
+          <a:effectLst/>
+        </p:spPr>
+        <p:style>
+          <a:lnRef idx="1">
+            <a:schemeClr val="accent1"/>
+          </a:lnRef>
+          <a:fillRef idx="3">
+            <a:schemeClr val="accent1"/>
+          </a:fillRef>
+          <a:effectRef idx="2">
+            <a:schemeClr val="accent1"/>
+          </a:effectRef>
+          <a:fontRef idx="minor">
+            <a:schemeClr val="lt1"/>
+          </a:fontRef>
+        </p:style>
+        <p:txBody>
+          <a:bodyPr rtlCol="0" anchor="ctr" lIns="54864" rIns="54864" tIns="0" bIns="0" wrap="square"/>
+          <a:lstStyle/>
+          <a:p>
+            <a:pPr algn="ctr"/>
+            <a:r>
+              <a:rPr sz="1100" b="1" i="0">
+                <a:solidFill>
+                  <a:srgbClr val="FFFFFF"/>
+                </a:solidFill>
+                <a:latin typeface="Arial"/>
+              </a:rPr>
+              <a:t>its own</a:t>
+            </a:r>
+          </a:p>
+        </p:txBody>
+      </p:sp>
+      <p:sp>
+        <p:nvSpPr>
+          <p:cNvPr id="17" name="Rectangle 16"/>
+          <p:cNvSpPr/>
+          <p:nvPr/>
+        </p:nvSpPr>
+        <p:spPr>
+          <a:xfrm>
+            <a:off x="4544568" y="3447287"/>
+            <a:ext cx="877824" cy="438912"/>
+          </a:xfrm>
+          <a:prstGeom prst="rect">
+            <a:avLst/>
+          </a:prstGeom>
+          <a:solidFill>
+            <a:srgbClr val="E5F5FB"/>
+          </a:solidFill>
+          <a:ln w="9525">
+            <a:solidFill>
+              <a:srgbClr val="FFFFFF"/>
+            </a:solidFill>
+          </a:ln>
+          <a:effectLst/>
+        </p:spPr>
+        <p:style>
+          <a:lnRef idx="1">
+            <a:schemeClr val="accent1"/>
+          </a:lnRef>
+          <a:fillRef idx="3">
+            <a:schemeClr val="accent1"/>
+          </a:fillRef>
+          <a:effectRef idx="2">
+            <a:schemeClr val="accent1"/>
+          </a:effectRef>
+          <a:fontRef idx="minor">
+            <a:schemeClr val="lt1"/>
+          </a:fontRef>
+        </p:style>
+        <p:txBody>
+          <a:bodyPr rtlCol="0" anchor="ctr" lIns="54864" rIns="54864" tIns="0" bIns="0" wrap="square"/>
+          <a:lstStyle/>
+          <a:p>
+            <a:pPr algn="ctr"/>
+            <a:r>
+              <a:rPr sz="1100" b="1" i="0">
+                <a:solidFill>
+                  <a:srgbClr val="006E96"/>
+                </a:solidFill>
+                <a:latin typeface="Arial"/>
+              </a:rPr>
+              <a:t>consumes</a:t>
+            </a:r>
+          </a:p>
+        </p:txBody>
+      </p:sp>
+      <p:sp>
+        <p:nvSpPr>
+          <p:cNvPr id="18" name="TextBox 17"/>
+          <p:cNvSpPr txBox="1"/>
+          <p:nvPr/>
+        </p:nvSpPr>
+        <p:spPr>
+          <a:xfrm>
+            <a:off x="5541264" y="3392423"/>
+            <a:ext cx="5998464" cy="548640"/>
+          </a:xfrm>
+          <a:prstGeom prst="rect">
+            <a:avLst/>
+          </a:prstGeom>
+          <a:noFill/>
+        </p:spPr>
+        <p:txBody>
+          <a:bodyPr wrap="square" anchor="ctr">
+            <a:spAutoFit/>
+          </a:bodyPr>
+          <a:lstStyle/>
+          <a:p>
+            <a:r>
+              <a:rPr sz="1200" b="0" i="1">
+                <a:solidFill>
+                  <a:srgbClr val="595959"/>
+                </a:solidFill>
+                <a:latin typeface="Arial"/>
+              </a:rPr>
+              <a:t>reuses the data-exchange backbone</a:t>
+            </a:r>
+          </a:p>
+        </p:txBody>
+      </p:sp>
+      <p:sp>
+        <p:nvSpPr>
+          <p:cNvPr id="19" name="TextBox 18"/>
+          <p:cNvSpPr txBox="1"/>
+          <p:nvPr/>
+        </p:nvSpPr>
+        <p:spPr>
+          <a:xfrm>
+            <a:off x="658368" y="4142231"/>
+            <a:ext cx="2514600" cy="548640"/>
+          </a:xfrm>
+          <a:prstGeom prst="rect">
+            <a:avLst/>
+          </a:prstGeom>
+          <a:noFill/>
+        </p:spPr>
+        <p:txBody>
+          <a:bodyPr wrap="square" anchor="ctr">
+            <a:spAutoFit/>
+          </a:bodyPr>
+          <a:lstStyle/>
+          <a:p>
+            <a:r>
+              <a:rPr sz="1400" b="1" i="0">
+                <a:solidFill>
+                  <a:srgbClr val="1A1A1A"/>
+                </a:solidFill>
+                <a:latin typeface="Arial"/>
+              </a:rPr>
+              <a:t>Sector 4 — social protection</a:t>
+            </a:r>
+          </a:p>
+        </p:txBody>
+      </p:sp>
+      <p:sp>
+        <p:nvSpPr>
+          <p:cNvPr id="20" name="Rectangle 19"/>
+          <p:cNvSpPr/>
+          <p:nvPr/>
+        </p:nvSpPr>
+        <p:spPr>
+          <a:xfrm>
+            <a:off x="3310128" y="4197095"/>
+            <a:ext cx="960120" cy="438912"/>
+          </a:xfrm>
+          <a:prstGeom prst="rect">
+            <a:avLst/>
+          </a:prstGeom>
+          <a:solidFill>
+            <a:srgbClr val="009CD6"/>
+          </a:solidFill>
+          <a:ln w="9525">
+            <a:solidFill>
+              <a:srgbClr val="FFFFFF"/>
+            </a:solidFill>
+          </a:ln>
+          <a:effectLst/>
+        </p:spPr>
+        <p:style>
+          <a:lnRef idx="1">
+            <a:schemeClr val="accent1"/>
+          </a:lnRef>
+          <a:fillRef idx="3">
+            <a:schemeClr val="accent1"/>
+          </a:fillRef>
+          <a:effectRef idx="2">
+            <a:schemeClr val="accent1"/>
+          </a:effectRef>
+          <a:fontRef idx="minor">
+            <a:schemeClr val="lt1"/>
+          </a:fontRef>
+        </p:style>
+        <p:txBody>
+          <a:bodyPr rtlCol="0" anchor="ctr" lIns="54864" rIns="54864" tIns="0" bIns="0" wrap="square"/>
+          <a:lstStyle/>
+          <a:p>
+            <a:pPr algn="ctr"/>
+            <a:r>
+              <a:rPr sz="1100" b="1" i="0">
+                <a:solidFill>
+                  <a:srgbClr val="FFFFFF"/>
+                </a:solidFill>
+                <a:latin typeface="Arial"/>
+              </a:rPr>
+              <a:t>its own</a:t>
+            </a:r>
+          </a:p>
+        </p:txBody>
+      </p:sp>
+      <p:sp>
+        <p:nvSpPr>
+          <p:cNvPr id="21" name="Rectangle 20"/>
+          <p:cNvSpPr/>
+          <p:nvPr/>
+        </p:nvSpPr>
+        <p:spPr>
+          <a:xfrm>
+            <a:off x="4297680" y="4197095"/>
+            <a:ext cx="877824" cy="438912"/>
+          </a:xfrm>
+          <a:prstGeom prst="rect">
+            <a:avLst/>
+          </a:prstGeom>
+          <a:solidFill>
+            <a:srgbClr val="E5F5FB"/>
+          </a:solidFill>
+          <a:ln w="9525">
+            <a:solidFill>
+              <a:srgbClr val="FFFFFF"/>
+            </a:solidFill>
+          </a:ln>
+          <a:effectLst/>
+        </p:spPr>
+        <p:style>
+          <a:lnRef idx="1">
+            <a:schemeClr val="accent1"/>
+          </a:lnRef>
+          <a:fillRef idx="3">
+            <a:schemeClr val="accent1"/>
+          </a:fillRef>
+          <a:effectRef idx="2">
+            <a:schemeClr val="accent1"/>
+          </a:effectRef>
+          <a:fontRef idx="minor">
+            <a:schemeClr val="lt1"/>
+          </a:fontRef>
+        </p:style>
+        <p:txBody>
+          <a:bodyPr rtlCol="0" anchor="ctr" lIns="54864" rIns="54864" tIns="0" bIns="0" wrap="square"/>
+          <a:lstStyle/>
+          <a:p>
+            <a:pPr algn="ctr"/>
+            <a:r>
+              <a:rPr sz="1100" b="1" i="0">
+                <a:solidFill>
+                  <a:srgbClr val="006E96"/>
+                </a:solidFill>
+                <a:latin typeface="Arial"/>
+              </a:rPr>
+              <a:t>consumes</a:t>
+            </a:r>
+          </a:p>
+        </p:txBody>
+      </p:sp>
+      <p:sp>
+        <p:nvSpPr>
+          <p:cNvPr id="22" name="TextBox 21"/>
+          <p:cNvSpPr txBox="1"/>
+          <p:nvPr/>
+        </p:nvSpPr>
+        <p:spPr>
+          <a:xfrm>
+            <a:off x="5294376" y="4142231"/>
+            <a:ext cx="6245352" cy="548640"/>
+          </a:xfrm>
+          <a:prstGeom prst="rect">
+            <a:avLst/>
+          </a:prstGeom>
+          <a:noFill/>
+        </p:spPr>
+        <p:txBody>
+          <a:bodyPr wrap="square" anchor="ctr">
+            <a:spAutoFit/>
+          </a:bodyPr>
+          <a:lstStyle/>
+          <a:p>
+            <a:r>
+              <a:rPr sz="1200" b="0" i="1">
+                <a:solidFill>
+                  <a:srgbClr val="595959"/>
+                </a:solidFill>
+                <a:latin typeface="Arial"/>
+              </a:rPr>
+              <a:t>the platforms are more complete each time</a:t>
+            </a:r>
+          </a:p>
+        </p:txBody>
+      </p:sp>
+      <p:sp>
+        <p:nvSpPr>
+          <p:cNvPr id="23" name="TextBox 22"/>
+          <p:cNvSpPr txBox="1"/>
+          <p:nvPr/>
+        </p:nvSpPr>
+        <p:spPr>
+          <a:xfrm>
+            <a:off x="658368" y="5760720"/>
+            <a:ext cx="10881360" cy="548640"/>
+          </a:xfrm>
+          <a:prstGeom prst="rect">
+            <a:avLst/>
+          </a:prstGeom>
+          <a:noFill/>
+        </p:spPr>
+        <p:txBody>
+          <a:bodyPr wrap="square">
+            <a:spAutoFit/>
+          </a:bodyPr>
+          <a:lstStyle/>
+          <a:p>
+            <a:r>
+              <a:rPr sz="1550" b="1" i="0">
+                <a:solidFill>
+                  <a:srgbClr val="006E96"/>
+                </a:solidFill>
+                <a:latin typeface="Arial"/>
+              </a:rPr>
+              <a:t>The investment you make for one sector is, in large part, an investment for all.</a:t>
+            </a:r>
+          </a:p>
+        </p:txBody>
+      </p:sp>
+      <p:sp>
+        <p:nvSpPr>
+          <p:cNvPr id="24" name="TextBox 23"/>
           <p:cNvSpPr txBox="1"/>
           <p:nvPr/>
         </p:nvSpPr>
@@ -14505,7 +14336,7 @@
                 </a:solidFill>
                 <a:latin typeface="Arial"/>
               </a:rPr>
-              <a:t>5.3 · Play 2 — Build the whole-of-government re-use business case</a:t>
+              <a:t>5.3 · Will it work for your other sectors? — the portability case</a:t>
             </a:r>
           </a:p>
         </p:txBody>
@@ -14601,7 +14432,7 @@
                 </a:solidFill>
                 <a:latin typeface="Arial"/>
               </a:rPr>
-              <a:t>Use the total to motivate a costing, not to quote it</a:t>
+              <a:t>You are not buying a one-sector tool</a:t>
             </a:r>
           </a:p>
         </p:txBody>
@@ -14615,7 +14446,7 @@
         <p:spPr>
           <a:xfrm>
             <a:off x="658368" y="1600200"/>
-            <a:ext cx="10881360" cy="1984248"/>
+            <a:ext cx="10881360" cy="2651760"/>
           </a:xfrm>
           <a:prstGeom prst="rect">
             <a:avLst/>
@@ -14640,7 +14471,7 @@
                 </a:solidFill>
                 <a:latin typeface="Arial"/>
               </a:rPr>
-              <a:t>The numbers are directional. Their job is to win the argument that re-use deserves a proper costing — not to be the costing.</a:t>
+              <a:t>You are building a national capability, of which the first sector is the foundation and the proof. The first sector carries more of the cost because it builds the shared muscle; every sector after it costs less.</a:t>
             </a:r>
           </a:p>
           <a:p>
@@ -14656,7 +14487,7 @@
                 </a:solidFill>
                 <a:latin typeface="Arial"/>
               </a:rPr>
-              <a:t>Present the country-level total as a reason to commission a detailed business case, and name the conditions that make the saving real: the shared blocks exist, the Board has authority, the funding is sustained.</a:t>
+              <a:t>That is a stronger case to make, and an honest one.</a:t>
             </a:r>
           </a:p>
         </p:txBody>
@@ -14669,7 +14500,7 @@
         </p:nvSpPr>
         <p:spPr>
           <a:xfrm>
-            <a:off x="658368" y="3767328"/>
+            <a:off x="658368" y="4434840"/>
             <a:ext cx="10881360" cy="1325880"/>
           </a:xfrm>
           <a:prstGeom prst="roundRect">
@@ -14715,7 +14546,7 @@
         </p:nvSpPr>
         <p:spPr>
           <a:xfrm>
-            <a:off x="859536" y="3959352"/>
+            <a:off x="859536" y="4626864"/>
             <a:ext cx="10479024" cy="1051560"/>
           </a:xfrm>
           <a:prstGeom prst="rect">
@@ -14741,7 +14572,7 @@
                 </a:solidFill>
                 <a:latin typeface="Arial"/>
               </a:rPr>
-              <a:t>Oversell the numbers and a sharp finance officer dismisses the whole case.</a:t>
+              <a:t>A minister who funds this as one sector undersells it.</a:t>
             </a:r>
           </a:p>
         </p:txBody>
@@ -14775,7 +14606,7 @@
                 </a:solidFill>
                 <a:latin typeface="Arial"/>
               </a:rPr>
-              <a:t>5.3 · Play 2 — Build the whole-of-government re-use business case</a:t>
+              <a:t>5.3 · Will it work for your other sectors? — the portability case</a:t>
             </a:r>
           </a:p>
         </p:txBody>
@@ -14827,7 +14658,7 @@
                 </a:solidFill>
                 <a:latin typeface="Arial"/>
               </a:rPr>
-              <a:t>This play makes the re-use saving visible — a per-programme cost table totalled to a country-level number — turning the whole-of-government argument into a figure the budget authority can act on.</a:t>
+              <a:t>The method is sector-agnostic — same phases, only the central record changes — and because the muscle is built once, every sector after the first is cheaper and faster.</a:t>
             </a:r>
           </a:p>
         </p:txBody>
@@ -14895,7 +14726,7 @@
                 </a:solidFill>
                 <a:latin typeface="Arial"/>
               </a:rPr>
-              <a:t>5.3 · Play 2 — Build the whole-of-government re-use business case</a:t>
+              <a:t>5.3 · Will it work for your other sectors? — the portability case</a:t>
             </a:r>
           </a:p>
         </p:txBody>
@@ -15065,7 +14896,7 @@
                 </a:solidFill>
                 <a:latin typeface="Arial"/>
               </a:rPr>
-              <a:t>•  PAERA v1.0 — §5.6 (Sourcing Strategy)</a:t>
+              <a:t>•  PAERA v1.0 — §5.4 (Organisational Assessment &amp; Roadmap)</a:t>
             </a:r>
           </a:p>
           <a:p>
@@ -15081,7 +14912,7 @@
                 </a:solidFill>
                 <a:latin typeface="Arial"/>
               </a:rPr>
-              <a:t>•  PAERA v1.0 — §1.3 (GovStack Vision)</a:t>
+              <a:t>•  PAERA v1.0 — §5.7 (Recommended Roadmap)</a:t>
             </a:r>
           </a:p>
         </p:txBody>
@@ -15149,7 +14980,7 @@
                 </a:solidFill>
                 <a:latin typeface="Arial"/>
               </a:rPr>
-              <a:t>5.3 · Play 2 — Build the whole-of-government re-use business case</a:t>
+              <a:t>5.3 · Will it work for your other sectors? — the portability case</a:t>
             </a:r>
           </a:p>
         </p:txBody>
